--- a/docs/to-be/nl2sql-플로우차트.pptx
+++ b/docs/to-be/nl2sql-플로우차트.pptx
@@ -9,7 +9,6 @@
     <p:sldId id="257" r:id="rId8"/>
     <p:sldId id="258" r:id="rId9"/>
     <p:sldId id="259" r:id="rId10"/>
-    <p:sldId id="260" r:id="rId11"/>
   </p:sldIdLst>
   <p:sldSz cx="9601200" cy="12801600" type="screen4x3"/>
   <p:notesSz cx="6858000" cy="9144000"/>
@@ -4620,7 +4619,7 @@
                 <a:latin typeface="맑은 고딕"/>
                 <a:ea typeface="맑은 고딕"/>
               </a:rPr>
-              <a:t>업무 영역 설명(domain_desc)은 20개 시스템만이라 사람이 쓴다. 테이블 추론 프롬프트 첫머리와 평가 문항 생성에 쓰인다. 호스트·계정 오류는 이 단계에서 드러나지 않는다 — 실제 접속은 동기화에서 처음 일어난다.</a:t>
+              <a:t>업무 영역 설명(domain_desc)은 20개 시스템만이라 사람이 쓴다. 테이블 추론 프롬프트 첫머리에 쓰인다. 호스트·계정 오류는 이 단계에서 드러나지 않는다 — 실제 접속은 동기화에서 처음 일어난다.</a:t>
             </a:r>
           </a:p>
         </p:txBody>
@@ -6114,24 +6113,24 @@
       </p:cxnSp>
       <p:sp>
         <p:nvSpPr>
-          <p:cNvPr id="20" name="Diamond 19"/>
+          <p:cNvPr id="20" name="Rectangle 19"/>
           <p:cNvSpPr/>
           <p:nvPr/>
         </p:nvSpPr>
         <p:spPr>
           <a:xfrm>
             <a:off x="825500" y="6756400"/>
-            <a:ext cx="4572000" cy="1066800"/>
-          </a:xfrm>
-          <a:prstGeom prst="diamond">
+            <a:ext cx="4572000" cy="762000"/>
+          </a:xfrm>
+          <a:prstGeom prst="rect">
             <a:avLst/>
           </a:prstGeom>
           <a:solidFill>
-            <a:srgbClr val="FFFBEB"/>
+            <a:srgbClr val="EFF6FF"/>
           </a:solidFill>
           <a:ln w="12700">
             <a:solidFill>
-              <a:srgbClr val="FBBF24"/>
+              <a:srgbClr val="60A5FA"/>
             </a:solidFill>
           </a:ln>
           <a:effectLst/>
@@ -6151,7 +6150,7 @@
           </a:fontRef>
         </p:style>
         <p:txBody>
-          <a:bodyPr rtlCol="0" anchor="ctr" wrap="square" lIns="0" rIns="0" tIns="25400" bIns="25400"/>
+          <a:bodyPr rtlCol="0" anchor="ctr" wrap="square" lIns="127000" rIns="127000" tIns="25400" bIns="25400"/>
           <a:lstStyle/>
           <a:p>
             <a:pPr algn="ctr"/>
@@ -6163,7 +6162,7 @@
                 <a:latin typeface="맑은 고딕"/>
                 <a:ea typeface="맑은 고딕"/>
               </a:rPr>
-              <a:t>구조가 바뀐 테이블?</a:t>
+              <a:t>영향받는 지표 표시</a:t>
             </a:r>
           </a:p>
           <a:p>
@@ -6176,7 +6175,20 @@
                 <a:latin typeface="맑은 고딕"/>
                 <a:ea typeface="맑은 고딕"/>
               </a:rPr>
-              <a:t>purpose + 컬럼 구성 해시 비교</a:t>
+              <a:t>사라진 테이블·컬럼을 쓰는 지표 → status = broken</a:t>
+            </a:r>
+          </a:p>
+          <a:p>
+            <a:pPr algn="ctr"/>
+            <a:r>
+              <a:rPr sz="950" b="0">
+                <a:solidFill>
+                  <a:srgbClr val="64748B"/>
+                </a:solidFill>
+                <a:latin typeface="맑은 고딕"/>
+                <a:ea typeface="맑은 고딕"/>
+              </a:rPr>
+              <a:t>broken_reason 기록</a:t>
             </a:r>
           </a:p>
         </p:txBody>
@@ -6189,7 +6201,7 @@
         </p:nvSpPr>
         <p:spPr>
           <a:xfrm>
-            <a:off x="4965700" y="6859524"/>
+            <a:off x="4965700" y="6743700"/>
             <a:ext cx="355600" cy="177800"/>
           </a:xfrm>
           <a:prstGeom prst="roundRect">
@@ -6235,16 +6247,52 @@
           </a:p>
         </p:txBody>
       </p:sp>
-      <p:sp>
-        <p:nvSpPr>
-          <p:cNvPr id="22" name="Parallelogram 21"/>
+      <p:cxnSp>
+        <p:nvCxnSpPr>
+          <p:cNvPr id="22" name="Connector 21"/>
+          <p:cNvCxnSpPr/>
+          <p:nvPr/>
+        </p:nvCxnSpPr>
+        <p:spPr>
+          <a:xfrm>
+            <a:off x="3111500" y="7518400"/>
+            <a:ext cx="0" cy="304800"/>
+          </a:xfrm>
+          <a:prstGeom prst="line">
+            <a:avLst/>
+          </a:prstGeom>
+          <a:ln w="13970">
+            <a:solidFill>
+              <a:srgbClr val="94A3B8"/>
+            </a:solidFill>
+            <a:tailEnd type="triangle" w="med" len="med"/>
+          </a:ln>
+        </p:spPr>
+        <p:style>
+          <a:lnRef idx="2">
+            <a:schemeClr val="accent1"/>
+          </a:lnRef>
+          <a:fillRef idx="0">
+            <a:schemeClr val="accent1"/>
+          </a:fillRef>
+          <a:effectRef idx="1">
+            <a:schemeClr val="accent1"/>
+          </a:effectRef>
+          <a:fontRef idx="minor">
+            <a:schemeClr val="tx1"/>
+          </a:fontRef>
+        </p:style>
+      </p:cxnSp>
+      <p:sp>
+        <p:nvSpPr>
+          <p:cNvPr id="23" name="Parallelogram 22"/>
           <p:cNvSpPr/>
           <p:nvPr/>
         </p:nvSpPr>
         <p:spPr>
           <a:xfrm>
-            <a:off x="5994400" y="6883400"/>
-            <a:ext cx="3111500" cy="812800"/>
+            <a:off x="825500" y="7823200"/>
+            <a:ext cx="4572000" cy="635000"/>
           </a:xfrm>
           <a:prstGeom prst="parallelogram">
             <a:avLst/>
@@ -6286,7 +6334,7 @@
                 <a:latin typeface="맑은 고딕"/>
                 <a:ea typeface="맑은 고딕"/>
               </a:rPr>
-              <a:t>보강 대기열 등록</a:t>
+              <a:t>동기화 완료</a:t>
             </a:r>
           </a:p>
           <a:p>
@@ -6299,34 +6347,21 @@
                 <a:latin typeface="맑은 고딕"/>
                 <a:ea typeface="맑은 고딕"/>
               </a:rPr>
-              <a:t>enrich_job (table, changed)</a:t>
-            </a:r>
-          </a:p>
-          <a:p>
-            <a:pPr algn="ctr"/>
-            <a:r>
-              <a:rPr sz="950" b="0">
-                <a:solidFill>
-                  <a:srgbClr val="64748B"/>
-                </a:solidFill>
-                <a:latin typeface="맑은 고딕"/>
-                <a:ea typeface="맑은 고딕"/>
-              </a:rPr>
-              <a:t>테이블 카드 다시 만들기 → ④</a:t>
+              <a:t>meta_sync_log: 추가 · 변경 · 삭제 건수, 깨진 지표</a:t>
             </a:r>
           </a:p>
         </p:txBody>
       </p:sp>
       <p:cxnSp>
         <p:nvCxnSpPr>
-          <p:cNvPr id="23" name="Connector 22"/>
+          <p:cNvPr id="24" name="Connector 23"/>
           <p:cNvCxnSpPr/>
           <p:nvPr/>
         </p:nvCxnSpPr>
         <p:spPr>
           <a:xfrm>
-            <a:off x="5397500" y="7289800"/>
-            <a:ext cx="774700" cy="0"/>
+            <a:off x="3111500" y="8458200"/>
+            <a:ext cx="0" cy="304800"/>
           </a:xfrm>
           <a:prstGeom prst="line">
             <a:avLst/>
@@ -6355,398 +6390,13 @@
       </p:cxnSp>
       <p:sp>
         <p:nvSpPr>
-          <p:cNvPr id="24" name="TextBox 23"/>
-          <p:cNvSpPr txBox="1"/>
-          <p:nvPr/>
-        </p:nvSpPr>
-        <p:spPr>
-          <a:xfrm>
-            <a:off x="5422900" y="7099300"/>
-            <a:ext cx="546100" cy="152400"/>
-          </a:xfrm>
-          <a:prstGeom prst="rect">
-            <a:avLst/>
-          </a:prstGeom>
-          <a:noFill/>
-        </p:spPr>
-        <p:txBody>
-          <a:bodyPr wrap="square" anchor="t" lIns="0" rIns="0" tIns="0" bIns="0">
-            <a:spAutoFit/>
-          </a:bodyPr>
-          <a:lstStyle/>
-          <a:p>
-            <a:pPr algn="ctr"/>
-            <a:r>
-              <a:rPr sz="850" b="0">
-                <a:solidFill>
-                  <a:srgbClr val="94A3B8"/>
-                </a:solidFill>
-                <a:latin typeface="맑은 고딕"/>
-                <a:ea typeface="맑은 고딕"/>
-              </a:rPr>
-              <a:t>있음</a:t>
-            </a:r>
-          </a:p>
-        </p:txBody>
-      </p:sp>
-      <p:cxnSp>
-        <p:nvCxnSpPr>
-          <p:cNvPr id="25" name="Connector 24"/>
-          <p:cNvCxnSpPr/>
-          <p:nvPr/>
-        </p:nvCxnSpPr>
-        <p:spPr>
-          <a:xfrm>
-            <a:off x="3111500" y="7823200"/>
-            <a:ext cx="0" cy="304800"/>
-          </a:xfrm>
-          <a:prstGeom prst="line">
-            <a:avLst/>
-          </a:prstGeom>
-          <a:ln w="13970">
-            <a:solidFill>
-              <a:srgbClr val="94A3B8"/>
-            </a:solidFill>
-            <a:tailEnd type="triangle" w="med" len="med"/>
-          </a:ln>
-        </p:spPr>
-        <p:style>
-          <a:lnRef idx="2">
-            <a:schemeClr val="accent1"/>
-          </a:lnRef>
-          <a:fillRef idx="0">
-            <a:schemeClr val="accent1"/>
-          </a:fillRef>
-          <a:effectRef idx="1">
-            <a:schemeClr val="accent1"/>
-          </a:effectRef>
-          <a:fontRef idx="minor">
-            <a:schemeClr val="tx1"/>
-          </a:fontRef>
-        </p:style>
-      </p:cxnSp>
-      <p:sp>
-        <p:nvSpPr>
-          <p:cNvPr id="26" name="TextBox 25"/>
-          <p:cNvSpPr txBox="1"/>
-          <p:nvPr/>
-        </p:nvSpPr>
-        <p:spPr>
-          <a:xfrm>
-            <a:off x="1892300" y="7905750"/>
-            <a:ext cx="1143000" cy="139700"/>
-          </a:xfrm>
-          <a:prstGeom prst="rect">
-            <a:avLst/>
-          </a:prstGeom>
-          <a:noFill/>
-        </p:spPr>
-        <p:txBody>
-          <a:bodyPr wrap="square" anchor="t" lIns="0" rIns="0" tIns="0" bIns="0">
-            <a:spAutoFit/>
-          </a:bodyPr>
-          <a:lstStyle/>
-          <a:p>
-            <a:pPr algn="r"/>
-            <a:r>
-              <a:rPr sz="800" b="0">
-                <a:solidFill>
-                  <a:srgbClr val="94A3B8"/>
-                </a:solidFill>
-                <a:latin typeface="맑은 고딕"/>
-                <a:ea typeface="맑은 고딕"/>
-              </a:rPr>
-              <a:t>계속</a:t>
-            </a:r>
-          </a:p>
-        </p:txBody>
-      </p:sp>
-      <p:sp>
-        <p:nvSpPr>
-          <p:cNvPr id="27" name="Rectangle 26"/>
+          <p:cNvPr id="25" name="Oval 24"/>
           <p:cNvSpPr/>
           <p:nvPr/>
         </p:nvSpPr>
         <p:spPr>
           <a:xfrm>
-            <a:off x="825500" y="8128000"/>
-            <a:ext cx="4572000" cy="762000"/>
-          </a:xfrm>
-          <a:prstGeom prst="rect">
-            <a:avLst/>
-          </a:prstGeom>
-          <a:solidFill>
-            <a:srgbClr val="EFF6FF"/>
-          </a:solidFill>
-          <a:ln w="12700">
-            <a:solidFill>
-              <a:srgbClr val="60A5FA"/>
-            </a:solidFill>
-          </a:ln>
-          <a:effectLst/>
-        </p:spPr>
-        <p:style>
-          <a:lnRef idx="1">
-            <a:schemeClr val="accent1"/>
-          </a:lnRef>
-          <a:fillRef idx="3">
-            <a:schemeClr val="accent1"/>
-          </a:fillRef>
-          <a:effectRef idx="2">
-            <a:schemeClr val="accent1"/>
-          </a:effectRef>
-          <a:fontRef idx="minor">
-            <a:schemeClr val="lt1"/>
-          </a:fontRef>
-        </p:style>
-        <p:txBody>
-          <a:bodyPr rtlCol="0" anchor="ctr" wrap="square" lIns="127000" rIns="127000" tIns="25400" bIns="25400"/>
-          <a:lstStyle/>
-          <a:p>
-            <a:pPr algn="ctr"/>
-            <a:r>
-              <a:rPr sz="1250" b="1">
-                <a:solidFill>
-                  <a:srgbClr val="1E293B"/>
-                </a:solidFill>
-                <a:latin typeface="맑은 고딕"/>
-                <a:ea typeface="맑은 고딕"/>
-              </a:rPr>
-              <a:t>영향받는 지표 표시</a:t>
-            </a:r>
-          </a:p>
-          <a:p>
-            <a:pPr algn="ctr"/>
-            <a:r>
-              <a:rPr sz="950" b="0">
-                <a:solidFill>
-                  <a:srgbClr val="64748B"/>
-                </a:solidFill>
-                <a:latin typeface="맑은 고딕"/>
-                <a:ea typeface="맑은 고딕"/>
-              </a:rPr>
-              <a:t>사라진 테이블·컬럼을 쓰는 지표 → status = broken</a:t>
-            </a:r>
-          </a:p>
-          <a:p>
-            <a:pPr algn="ctr"/>
-            <a:r>
-              <a:rPr sz="950" b="0">
-                <a:solidFill>
-                  <a:srgbClr val="64748B"/>
-                </a:solidFill>
-                <a:latin typeface="맑은 고딕"/>
-                <a:ea typeface="맑은 고딕"/>
-              </a:rPr>
-              <a:t>broken_reason 기록</a:t>
-            </a:r>
-          </a:p>
-        </p:txBody>
-      </p:sp>
-      <p:sp>
-        <p:nvSpPr>
-          <p:cNvPr id="28" name="Rounded Rectangle 27"/>
-          <p:cNvSpPr/>
-          <p:nvPr/>
-        </p:nvSpPr>
-        <p:spPr>
-          <a:xfrm>
-            <a:off x="4965700" y="8115300"/>
-            <a:ext cx="355600" cy="177800"/>
-          </a:xfrm>
-          <a:prstGeom prst="roundRect">
-            <a:avLst/>
-          </a:prstGeom>
-          <a:solidFill>
-            <a:srgbClr val="D96C06"/>
-          </a:solidFill>
-          <a:ln>
-            <a:noFill/>
-          </a:ln>
-          <a:effectLst/>
-        </p:spPr>
-        <p:style>
-          <a:lnRef idx="1">
-            <a:schemeClr val="accent1"/>
-          </a:lnRef>
-          <a:fillRef idx="3">
-            <a:schemeClr val="accent1"/>
-          </a:fillRef>
-          <a:effectRef idx="2">
-            <a:schemeClr val="accent1"/>
-          </a:effectRef>
-          <a:fontRef idx="minor">
-            <a:schemeClr val="lt1"/>
-          </a:fontRef>
-        </p:style>
-        <p:txBody>
-          <a:bodyPr rtlCol="0" anchor="ctr" lIns="0" rIns="0" tIns="0" bIns="0"/>
-          <a:lstStyle/>
-          <a:p>
-            <a:pPr algn="ctr"/>
-            <a:r>
-              <a:rPr sz="750" b="1">
-                <a:solidFill>
-                  <a:srgbClr val="FFFFFF"/>
-                </a:solidFill>
-                <a:latin typeface="맑은 고딕"/>
-                <a:ea typeface="맑은 고딕"/>
-              </a:rPr>
-              <a:t>NEW</a:t>
-            </a:r>
-          </a:p>
-        </p:txBody>
-      </p:sp>
-      <p:cxnSp>
-        <p:nvCxnSpPr>
-          <p:cNvPr id="29" name="Connector 28"/>
-          <p:cNvCxnSpPr/>
-          <p:nvPr/>
-        </p:nvCxnSpPr>
-        <p:spPr>
-          <a:xfrm>
-            <a:off x="3111500" y="8890000"/>
-            <a:ext cx="0" cy="304800"/>
-          </a:xfrm>
-          <a:prstGeom prst="line">
-            <a:avLst/>
-          </a:prstGeom>
-          <a:ln w="13970">
-            <a:solidFill>
-              <a:srgbClr val="94A3B8"/>
-            </a:solidFill>
-            <a:tailEnd type="triangle" w="med" len="med"/>
-          </a:ln>
-        </p:spPr>
-        <p:style>
-          <a:lnRef idx="2">
-            <a:schemeClr val="accent1"/>
-          </a:lnRef>
-          <a:fillRef idx="0">
-            <a:schemeClr val="accent1"/>
-          </a:fillRef>
-          <a:effectRef idx="1">
-            <a:schemeClr val="accent1"/>
-          </a:effectRef>
-          <a:fontRef idx="minor">
-            <a:schemeClr val="tx1"/>
-          </a:fontRef>
-        </p:style>
-      </p:cxnSp>
-      <p:sp>
-        <p:nvSpPr>
-          <p:cNvPr id="30" name="Parallelogram 29"/>
-          <p:cNvSpPr/>
-          <p:nvPr/>
-        </p:nvSpPr>
-        <p:spPr>
-          <a:xfrm>
-            <a:off x="825500" y="9194800"/>
-            <a:ext cx="4572000" cy="635000"/>
-          </a:xfrm>
-          <a:prstGeom prst="parallelogram">
-            <a:avLst/>
-          </a:prstGeom>
-          <a:solidFill>
-            <a:srgbClr val="ECFDF5"/>
-          </a:solidFill>
-          <a:ln w="12700">
-            <a:solidFill>
-              <a:srgbClr val="34D399"/>
-            </a:solidFill>
-          </a:ln>
-          <a:effectLst/>
-        </p:spPr>
-        <p:style>
-          <a:lnRef idx="1">
-            <a:schemeClr val="accent1"/>
-          </a:lnRef>
-          <a:fillRef idx="3">
-            <a:schemeClr val="accent1"/>
-          </a:fillRef>
-          <a:effectRef idx="2">
-            <a:schemeClr val="accent1"/>
-          </a:effectRef>
-          <a:fontRef idx="minor">
-            <a:schemeClr val="lt1"/>
-          </a:fontRef>
-        </p:style>
-        <p:txBody>
-          <a:bodyPr rtlCol="0" anchor="ctr" wrap="square" lIns="279400" rIns="279400" tIns="25400" bIns="25400"/>
-          <a:lstStyle/>
-          <a:p>
-            <a:pPr algn="ctr"/>
-            <a:r>
-              <a:rPr sz="1250" b="1">
-                <a:solidFill>
-                  <a:srgbClr val="1E293B"/>
-                </a:solidFill>
-                <a:latin typeface="맑은 고딕"/>
-                <a:ea typeface="맑은 고딕"/>
-              </a:rPr>
-              <a:t>동기화 완료</a:t>
-            </a:r>
-          </a:p>
-          <a:p>
-            <a:pPr algn="ctr"/>
-            <a:r>
-              <a:rPr sz="950" b="0">
-                <a:solidFill>
-                  <a:srgbClr val="64748B"/>
-                </a:solidFill>
-                <a:latin typeface="맑은 고딕"/>
-                <a:ea typeface="맑은 고딕"/>
-              </a:rPr>
-              <a:t>meta_sync_log: 추가 · 변경 · 삭제 건수, 깨진 지표</a:t>
-            </a:r>
-          </a:p>
-        </p:txBody>
-      </p:sp>
-      <p:cxnSp>
-        <p:nvCxnSpPr>
-          <p:cNvPr id="31" name="Connector 30"/>
-          <p:cNvCxnSpPr/>
-          <p:nvPr/>
-        </p:nvCxnSpPr>
-        <p:spPr>
-          <a:xfrm>
-            <a:off x="3111500" y="9829800"/>
-            <a:ext cx="0" cy="304800"/>
-          </a:xfrm>
-          <a:prstGeom prst="line">
-            <a:avLst/>
-          </a:prstGeom>
-          <a:ln w="13970">
-            <a:solidFill>
-              <a:srgbClr val="94A3B8"/>
-            </a:solidFill>
-            <a:tailEnd type="triangle" w="med" len="med"/>
-          </a:ln>
-        </p:spPr>
-        <p:style>
-          <a:lnRef idx="2">
-            <a:schemeClr val="accent1"/>
-          </a:lnRef>
-          <a:fillRef idx="0">
-            <a:schemeClr val="accent1"/>
-          </a:fillRef>
-          <a:effectRef idx="1">
-            <a:schemeClr val="accent1"/>
-          </a:effectRef>
-          <a:fontRef idx="minor">
-            <a:schemeClr val="tx1"/>
-          </a:fontRef>
-        </p:style>
-      </p:cxnSp>
-      <p:sp>
-        <p:nvSpPr>
-          <p:cNvPr id="32" name="Oval 31"/>
-          <p:cNvSpPr/>
-          <p:nvPr/>
-        </p:nvSpPr>
-        <p:spPr>
-          <a:xfrm>
-            <a:off x="825500" y="10134600"/>
+            <a:off x="825500" y="8763000"/>
             <a:ext cx="4572000" cy="406400"/>
           </a:xfrm>
           <a:prstGeom prst="ellipse">
@@ -6796,7 +6446,7 @@
       </p:sp>
       <p:sp>
         <p:nvSpPr>
-          <p:cNvPr id="33" name="Rectangle 32"/>
+          <p:cNvPr id="26" name="Rectangle 25"/>
           <p:cNvSpPr/>
           <p:nvPr/>
         </p:nvSpPr>
@@ -6842,7 +6492,7 @@
       </p:sp>
       <p:sp>
         <p:nvSpPr>
-          <p:cNvPr id="34" name="TextBox 33"/>
+          <p:cNvPr id="27" name="TextBox 26"/>
           <p:cNvSpPr txBox="1"/>
           <p:nvPr/>
         </p:nvSpPr>
@@ -6878,7 +6528,7 @@
       </p:sp>
       <p:sp>
         <p:nvSpPr>
-          <p:cNvPr id="35" name="Oval 34"/>
+          <p:cNvPr id="28" name="Oval 27"/>
           <p:cNvSpPr/>
           <p:nvPr/>
         </p:nvSpPr>
@@ -6924,7 +6574,7 @@
       </p:sp>
       <p:sp>
         <p:nvSpPr>
-          <p:cNvPr id="36" name="TextBox 35"/>
+          <p:cNvPr id="29" name="TextBox 28"/>
           <p:cNvSpPr txBox="1"/>
           <p:nvPr/>
         </p:nvSpPr>
@@ -6960,7 +6610,7 @@
       </p:sp>
       <p:sp>
         <p:nvSpPr>
-          <p:cNvPr id="37" name="Rectangle 36"/>
+          <p:cNvPr id="30" name="Rectangle 29"/>
           <p:cNvSpPr/>
           <p:nvPr/>
         </p:nvSpPr>
@@ -7006,7 +6656,7 @@
       </p:sp>
       <p:sp>
         <p:nvSpPr>
-          <p:cNvPr id="38" name="TextBox 37"/>
+          <p:cNvPr id="31" name="TextBox 30"/>
           <p:cNvSpPr txBox="1"/>
           <p:nvPr/>
         </p:nvSpPr>
@@ -7042,7 +6692,7 @@
       </p:sp>
       <p:sp>
         <p:nvSpPr>
-          <p:cNvPr id="39" name="Diamond 38"/>
+          <p:cNvPr id="32" name="Diamond 31"/>
           <p:cNvSpPr/>
           <p:nvPr/>
         </p:nvSpPr>
@@ -7088,7 +6738,7 @@
       </p:sp>
       <p:sp>
         <p:nvSpPr>
-          <p:cNvPr id="40" name="TextBox 39"/>
+          <p:cNvPr id="33" name="TextBox 32"/>
           <p:cNvSpPr txBox="1"/>
           <p:nvPr/>
         </p:nvSpPr>
@@ -7124,7 +6774,7 @@
       </p:sp>
       <p:sp>
         <p:nvSpPr>
-          <p:cNvPr id="41" name="Parallelogram 40"/>
+          <p:cNvPr id="34" name="Parallelogram 33"/>
           <p:cNvSpPr/>
           <p:nvPr/>
         </p:nvSpPr>
@@ -7170,7 +6820,7 @@
       </p:sp>
       <p:sp>
         <p:nvSpPr>
-          <p:cNvPr id="42" name="TextBox 41"/>
+          <p:cNvPr id="35" name="TextBox 34"/>
           <p:cNvSpPr txBox="1"/>
           <p:nvPr/>
         </p:nvSpPr>
@@ -7206,7 +6856,7 @@
       </p:sp>
       <p:sp>
         <p:nvSpPr>
-          <p:cNvPr id="43" name="Parallelogram 42"/>
+          <p:cNvPr id="36" name="Parallelogram 35"/>
           <p:cNvSpPr/>
           <p:nvPr/>
         </p:nvSpPr>
@@ -7252,7 +6902,7 @@
       </p:sp>
       <p:sp>
         <p:nvSpPr>
-          <p:cNvPr id="44" name="TextBox 43"/>
+          <p:cNvPr id="37" name="TextBox 36"/>
           <p:cNvSpPr txBox="1"/>
           <p:nvPr/>
         </p:nvSpPr>
@@ -7288,7 +6938,7 @@
       </p:sp>
       <p:sp>
         <p:nvSpPr>
-          <p:cNvPr id="45" name="Rounded Rectangle 44"/>
+          <p:cNvPr id="38" name="Rounded Rectangle 37"/>
           <p:cNvSpPr/>
           <p:nvPr/>
         </p:nvSpPr>
@@ -7342,7 +6992,7 @@
       </p:sp>
       <p:sp>
         <p:nvSpPr>
-          <p:cNvPr id="46" name="Rounded Rectangle 45"/>
+          <p:cNvPr id="39" name="Rounded Rectangle 38"/>
           <p:cNvSpPr/>
           <p:nvPr/>
         </p:nvSpPr>
@@ -7396,7 +7046,7 @@
       </p:sp>
       <p:sp>
         <p:nvSpPr>
-          <p:cNvPr id="47" name="TextBox 46"/>
+          <p:cNvPr id="40" name="TextBox 39"/>
           <p:cNvSpPr txBox="1"/>
           <p:nvPr/>
         </p:nvSpPr>
@@ -7535,7 +7185,7 @@
                 <a:latin typeface="맑은 고딕"/>
                 <a:ea typeface="맑은 고딕"/>
               </a:rPr>
-              <a:t>스키마에서 뽑을 수 없는 업무 개념을 사람이 선언 — 정의 방식은 AS-IS 와 같고, 테이블 연결과 보강이 더해진다</a:t>
+              <a:t>스키마에서 뽑을 수 없는 업무 개념을 사람이 선언 — 정의 방식은 AS-IS 와 같고, 테이블 연결이 더해진다</a:t>
             </a:r>
           </a:p>
         </p:txBody>
@@ -8753,7 +8403,7 @@
                 <a:latin typeface="맑은 고딕"/>
                 <a:ea typeface="맑은 고딕"/>
               </a:rPr>
-              <a:t>metric (status = draft) · metric_history (create · update)</a:t>
+              <a:t>metric (status = active) · metric_history (create · update)</a:t>
             </a:r>
           </a:p>
         </p:txBody>
@@ -8968,172 +8618,13 @@
       </p:cxnSp>
       <p:sp>
         <p:nvSpPr>
-          <p:cNvPr id="32" name="Parallelogram 31"/>
+          <p:cNvPr id="32" name="Oval 31"/>
           <p:cNvSpPr/>
           <p:nvPr/>
         </p:nvSpPr>
         <p:spPr>
           <a:xfrm>
             <a:off x="825500" y="9271000"/>
-            <a:ext cx="4572000" cy="635000"/>
-          </a:xfrm>
-          <a:prstGeom prst="parallelogram">
-            <a:avLst/>
-          </a:prstGeom>
-          <a:solidFill>
-            <a:srgbClr val="ECFDF5"/>
-          </a:solidFill>
-          <a:ln w="12700">
-            <a:solidFill>
-              <a:srgbClr val="34D399"/>
-            </a:solidFill>
-          </a:ln>
-          <a:effectLst/>
-        </p:spPr>
-        <p:style>
-          <a:lnRef idx="1">
-            <a:schemeClr val="accent1"/>
-          </a:lnRef>
-          <a:fillRef idx="3">
-            <a:schemeClr val="accent1"/>
-          </a:fillRef>
-          <a:effectRef idx="2">
-            <a:schemeClr val="accent1"/>
-          </a:effectRef>
-          <a:fontRef idx="minor">
-            <a:schemeClr val="lt1"/>
-          </a:fontRef>
-        </p:style>
-        <p:txBody>
-          <a:bodyPr rtlCol="0" anchor="ctr" wrap="square" lIns="279400" rIns="279400" tIns="25400" bIns="25400"/>
-          <a:lstStyle/>
-          <a:p>
-            <a:pPr algn="ctr"/>
-            <a:r>
-              <a:rPr sz="1250" b="1">
-                <a:solidFill>
-                  <a:srgbClr val="1E293B"/>
-                </a:solidFill>
-                <a:latin typeface="맑은 고딕"/>
-                <a:ea typeface="맑은 고딕"/>
-              </a:rPr>
-              <a:t>보강 대기열 등록</a:t>
-            </a:r>
-          </a:p>
-          <a:p>
-            <a:pPr algn="ctr"/>
-            <a:r>
-              <a:rPr sz="950" b="0">
-                <a:solidFill>
-                  <a:srgbClr val="64748B"/>
-                </a:solidFill>
-                <a:latin typeface="맑은 고딕"/>
-                <a:ea typeface="맑은 고딕"/>
-              </a:rPr>
-              <a:t>enrich_job (metric) → ④ 예시 질문 · 동의어</a:t>
-            </a:r>
-          </a:p>
-        </p:txBody>
-      </p:sp>
-      <p:sp>
-        <p:nvSpPr>
-          <p:cNvPr id="33" name="Rounded Rectangle 32"/>
-          <p:cNvSpPr/>
-          <p:nvPr/>
-        </p:nvSpPr>
-        <p:spPr>
-          <a:xfrm>
-            <a:off x="4965700" y="9258300"/>
-            <a:ext cx="355600" cy="177800"/>
-          </a:xfrm>
-          <a:prstGeom prst="roundRect">
-            <a:avLst/>
-          </a:prstGeom>
-          <a:solidFill>
-            <a:srgbClr val="D96C06"/>
-          </a:solidFill>
-          <a:ln>
-            <a:noFill/>
-          </a:ln>
-          <a:effectLst/>
-        </p:spPr>
-        <p:style>
-          <a:lnRef idx="1">
-            <a:schemeClr val="accent1"/>
-          </a:lnRef>
-          <a:fillRef idx="3">
-            <a:schemeClr val="accent1"/>
-          </a:fillRef>
-          <a:effectRef idx="2">
-            <a:schemeClr val="accent1"/>
-          </a:effectRef>
-          <a:fontRef idx="minor">
-            <a:schemeClr val="lt1"/>
-          </a:fontRef>
-        </p:style>
-        <p:txBody>
-          <a:bodyPr rtlCol="0" anchor="ctr" lIns="0" rIns="0" tIns="0" bIns="0"/>
-          <a:lstStyle/>
-          <a:p>
-            <a:pPr algn="ctr"/>
-            <a:r>
-              <a:rPr sz="750" b="1">
-                <a:solidFill>
-                  <a:srgbClr val="FFFFFF"/>
-                </a:solidFill>
-                <a:latin typeface="맑은 고딕"/>
-                <a:ea typeface="맑은 고딕"/>
-              </a:rPr>
-              <a:t>NEW</a:t>
-            </a:r>
-          </a:p>
-        </p:txBody>
-      </p:sp>
-      <p:cxnSp>
-        <p:nvCxnSpPr>
-          <p:cNvPr id="34" name="Connector 33"/>
-          <p:cNvCxnSpPr/>
-          <p:nvPr/>
-        </p:nvCxnSpPr>
-        <p:spPr>
-          <a:xfrm>
-            <a:off x="3111500" y="9906000"/>
-            <a:ext cx="0" cy="254000"/>
-          </a:xfrm>
-          <a:prstGeom prst="line">
-            <a:avLst/>
-          </a:prstGeom>
-          <a:ln w="13970">
-            <a:solidFill>
-              <a:srgbClr val="94A3B8"/>
-            </a:solidFill>
-            <a:tailEnd type="triangle" w="med" len="med"/>
-          </a:ln>
-        </p:spPr>
-        <p:style>
-          <a:lnRef idx="2">
-            <a:schemeClr val="accent1"/>
-          </a:lnRef>
-          <a:fillRef idx="0">
-            <a:schemeClr val="accent1"/>
-          </a:fillRef>
-          <a:effectRef idx="1">
-            <a:schemeClr val="accent1"/>
-          </a:effectRef>
-          <a:fontRef idx="minor">
-            <a:schemeClr val="tx1"/>
-          </a:fontRef>
-        </p:style>
-      </p:cxnSp>
-      <p:sp>
-        <p:nvSpPr>
-          <p:cNvPr id="35" name="Oval 34"/>
-          <p:cNvSpPr/>
-          <p:nvPr/>
-        </p:nvSpPr>
-        <p:spPr>
-          <a:xfrm>
-            <a:off x="825500" y="10160000"/>
             <a:ext cx="4572000" cy="406400"/>
           </a:xfrm>
           <a:prstGeom prst="ellipse">
@@ -9183,7 +8674,7 @@
       </p:sp>
       <p:sp>
         <p:nvSpPr>
-          <p:cNvPr id="36" name="Rectangle 35"/>
+          <p:cNvPr id="33" name="Rectangle 32"/>
           <p:cNvSpPr/>
           <p:nvPr/>
         </p:nvSpPr>
@@ -9229,7 +8720,7 @@
       </p:sp>
       <p:sp>
         <p:nvSpPr>
-          <p:cNvPr id="37" name="TextBox 36"/>
+          <p:cNvPr id="34" name="TextBox 33"/>
           <p:cNvSpPr txBox="1"/>
           <p:nvPr/>
         </p:nvSpPr>
@@ -9258,14 +8749,14 @@
                 <a:latin typeface="맑은 고딕"/>
                 <a:ea typeface="맑은 고딕"/>
               </a:rPr>
-              <a:t>지표는 ④ 보강에서 예시 질문이 승인되어야 active 가 된다 — ⑤ 지표 선택이 예시 질문을 가장 강한 단서로 쓰기 때문이다. metric_table 은 사람이 손으로 잇지 않는다 — 정의에서 자동으로 만들어 ⑤ 의 '테이블 → 지표' 조회가 정의와 어긋나지 않게 한다.</a:t>
-            </a:r>
-          </a:p>
-        </p:txBody>
-      </p:sp>
-      <p:sp>
-        <p:nvSpPr>
-          <p:cNvPr id="38" name="Oval 37"/>
+              <a:t>지표는 저장하면 바로 active 가 되어 질문에 쓰인다 (스키마와 어긋나면 broken). 지표 선택은 이름 · 설명 · 같은 말만 보므로 설명을 실제 뜻대로 쓴다. metric_table 은 사람이 손으로 잇지 않는다 — 정의에서 자동으로 만들어 ④ 의 '테이블 → 지표' 조회가 정의와 어긋나지 않게 한다.</a:t>
+            </a:r>
+          </a:p>
+        </p:txBody>
+      </p:sp>
+      <p:sp>
+        <p:nvSpPr>
+          <p:cNvPr id="35" name="Oval 34"/>
           <p:cNvSpPr/>
           <p:nvPr/>
         </p:nvSpPr>
@@ -9311,7 +8802,7 @@
       </p:sp>
       <p:sp>
         <p:nvSpPr>
-          <p:cNvPr id="39" name="TextBox 38"/>
+          <p:cNvPr id="36" name="TextBox 35"/>
           <p:cNvSpPr txBox="1"/>
           <p:nvPr/>
         </p:nvSpPr>
@@ -9347,7 +8838,7 @@
       </p:sp>
       <p:sp>
         <p:nvSpPr>
-          <p:cNvPr id="40" name="Rectangle 39"/>
+          <p:cNvPr id="37" name="Rectangle 36"/>
           <p:cNvSpPr/>
           <p:nvPr/>
         </p:nvSpPr>
@@ -9393,7 +8884,7 @@
       </p:sp>
       <p:sp>
         <p:nvSpPr>
-          <p:cNvPr id="41" name="TextBox 40"/>
+          <p:cNvPr id="38" name="TextBox 37"/>
           <p:cNvSpPr txBox="1"/>
           <p:nvPr/>
         </p:nvSpPr>
@@ -9429,7 +8920,7 @@
       </p:sp>
       <p:sp>
         <p:nvSpPr>
-          <p:cNvPr id="42" name="Diamond 41"/>
+          <p:cNvPr id="39" name="Diamond 38"/>
           <p:cNvSpPr/>
           <p:nvPr/>
         </p:nvSpPr>
@@ -9475,7 +8966,7 @@
       </p:sp>
       <p:sp>
         <p:nvSpPr>
-          <p:cNvPr id="43" name="TextBox 42"/>
+          <p:cNvPr id="40" name="TextBox 39"/>
           <p:cNvSpPr txBox="1"/>
           <p:nvPr/>
         </p:nvSpPr>
@@ -9511,7 +9002,7 @@
       </p:sp>
       <p:sp>
         <p:nvSpPr>
-          <p:cNvPr id="44" name="Parallelogram 43"/>
+          <p:cNvPr id="41" name="Parallelogram 40"/>
           <p:cNvSpPr/>
           <p:nvPr/>
         </p:nvSpPr>
@@ -9557,7 +9048,7 @@
       </p:sp>
       <p:sp>
         <p:nvSpPr>
-          <p:cNvPr id="45" name="TextBox 44"/>
+          <p:cNvPr id="42" name="TextBox 41"/>
           <p:cNvSpPr txBox="1"/>
           <p:nvPr/>
         </p:nvSpPr>
@@ -9593,7 +9084,7 @@
       </p:sp>
       <p:sp>
         <p:nvSpPr>
-          <p:cNvPr id="46" name="Parallelogram 45"/>
+          <p:cNvPr id="43" name="Parallelogram 42"/>
           <p:cNvSpPr/>
           <p:nvPr/>
         </p:nvSpPr>
@@ -9639,7 +9130,7 @@
       </p:sp>
       <p:sp>
         <p:nvSpPr>
-          <p:cNvPr id="47" name="TextBox 46"/>
+          <p:cNvPr id="44" name="TextBox 43"/>
           <p:cNvSpPr txBox="1"/>
           <p:nvPr/>
         </p:nvSpPr>
@@ -9675,7 +9166,7 @@
       </p:sp>
       <p:sp>
         <p:nvSpPr>
-          <p:cNvPr id="48" name="Rounded Rectangle 47"/>
+          <p:cNvPr id="45" name="Rounded Rectangle 44"/>
           <p:cNvSpPr/>
           <p:nvPr/>
         </p:nvSpPr>
@@ -9729,7 +9220,7 @@
       </p:sp>
       <p:sp>
         <p:nvSpPr>
-          <p:cNvPr id="49" name="Rounded Rectangle 48"/>
+          <p:cNvPr id="46" name="Rounded Rectangle 45"/>
           <p:cNvSpPr/>
           <p:nvPr/>
         </p:nvSpPr>
@@ -9783,7 +9274,7 @@
       </p:sp>
       <p:sp>
         <p:nvSpPr>
-          <p:cNvPr id="50" name="TextBox 49"/>
+          <p:cNvPr id="47" name="TextBox 46"/>
           <p:cNvSpPr txBox="1"/>
           <p:nvPr/>
         </p:nvSpPr>
@@ -9886,7 +9377,7 @@
                 <a:latin typeface="맑은 고딕"/>
                 <a:ea typeface="맑은 고딕"/>
               </a:rPr>
-              <a:t>④ 메타데이터 보강</a:t>
+              <a:t>④ 질의 생성 (Query Generation)</a:t>
             </a:r>
           </a:p>
         </p:txBody>
@@ -9922,7 +9413,7 @@
                 <a:latin typeface="맑은 고딕"/>
                 <a:ea typeface="맑은 고딕"/>
               </a:rPr>
-              <a:t>선택 품질은 메타데이터가 정한다 — LLM 이 초안을 만들고, 사람이 승인한 것만 질문에 쓴다</a:t>
+              <a:t>넓게 고르고 점점 좁힌다 — 단계마다 LLM 에는 그 판단에 필요한 정보만 (컨텍스트 16K)</a:t>
             </a:r>
           </a:p>
         </p:txBody>
@@ -9989,8 +9480,8 @@
         </p:nvSpPr>
         <p:spPr>
           <a:xfrm>
-            <a:off x="825500" y="1778000"/>
-            <a:ext cx="4572000" cy="508000"/>
+            <a:off x="825500" y="1676400"/>
+            <a:ext cx="4572000" cy="355600"/>
           </a:xfrm>
           <a:prstGeom prst="ellipse">
             <a:avLst/>
@@ -10035,19 +9526,6 @@
               <a:t>시작</a:t>
             </a:r>
           </a:p>
-          <a:p>
-            <a:pPr algn="ctr"/>
-            <a:r>
-              <a:rPr sz="950" b="0">
-                <a:solidFill>
-                  <a:srgbClr val="64748B"/>
-                </a:solidFill>
-                <a:latin typeface="맑은 고딕"/>
-                <a:ea typeface="맑은 고딕"/>
-              </a:rPr>
-              <a:t>배치 · 대기열(enrich_job)에서 꺼냄</a:t>
-            </a:r>
-          </a:p>
         </p:txBody>
       </p:sp>
       <p:cxnSp>
@@ -10058,8 +9536,8 @@
         </p:nvCxnSpPr>
         <p:spPr>
           <a:xfrm>
-            <a:off x="3111500" y="2286000"/>
-            <a:ext cx="0" cy="330200"/>
+            <a:off x="3111500" y="2032000"/>
+            <a:ext cx="0" cy="228600"/>
           </a:xfrm>
           <a:prstGeom prst="line">
             <a:avLst/>
@@ -10094,8 +9572,8 @@
         </p:nvSpPr>
         <p:spPr>
           <a:xfrm>
-            <a:off x="825500" y="2616200"/>
-            <a:ext cx="4572000" cy="736600"/>
+            <a:off x="825500" y="2260600"/>
+            <a:ext cx="4572000" cy="584200"/>
           </a:xfrm>
           <a:prstGeom prst="parallelogram">
             <a:avLst/>
@@ -10137,7 +9615,7 @@
                 <a:latin typeface="맑은 고딕"/>
                 <a:ea typeface="맑은 고딕"/>
               </a:rPr>
-              <a:t>재료 모으기</a:t>
+              <a:t>시스템 선택 + 자연어 질문</a:t>
             </a:r>
           </a:p>
           <a:p>
@@ -10150,20 +9628,7 @@
                 <a:latin typeface="맑은 고딕"/>
                 <a:ea typeface="맑은 고딕"/>
               </a:rPr>
-              <a:t>테이블: 용도 · 코멘트 · 컬럼</a:t>
-            </a:r>
-          </a:p>
-          <a:p>
-            <a:pPr algn="ctr"/>
-            <a:r>
-              <a:rPr sz="950" b="0">
-                <a:solidFill>
-                  <a:srgbClr val="64748B"/>
-                </a:solidFill>
-                <a:latin typeface="맑은 고딕"/>
-                <a:ea typeface="맑은 고딕"/>
-              </a:rPr>
-              <a:t>지표: 이름 · 설명 · 정의 · 연결 테이블</a:t>
+              <a:t>이전 질문은 전달되지 않음 — 매 요청 독립</a:t>
             </a:r>
           </a:p>
         </p:txBody>
@@ -10176,8 +9641,8 @@
         </p:nvCxnSpPr>
         <p:spPr>
           <a:xfrm>
-            <a:off x="3111500" y="3352800"/>
-            <a:ext cx="0" cy="330200"/>
+            <a:off x="3111500" y="2844800"/>
+            <a:ext cx="0" cy="228600"/>
           </a:xfrm>
           <a:prstGeom prst="line">
             <a:avLst/>
@@ -10212,8 +9677,8 @@
         </p:nvSpPr>
         <p:spPr>
           <a:xfrm>
-            <a:off x="825500" y="3683000"/>
-            <a:ext cx="4572000" cy="812800"/>
+            <a:off x="825500" y="3073400"/>
+            <a:ext cx="4572000" cy="736600"/>
           </a:xfrm>
           <a:prstGeom prst="rect">
             <a:avLst/>
@@ -10255,7 +9720,7 @@
                 <a:latin typeface="맑은 고딕"/>
                 <a:ea typeface="맑은 고딕"/>
               </a:rPr>
-              <a:t>초안 생성 (LLM)</a:t>
+              <a:t>테이블 추론 (LLM)</a:t>
             </a:r>
           </a:p>
           <a:p>
@@ -10268,7 +9733,7 @@
                 <a:latin typeface="맑은 고딕"/>
                 <a:ea typeface="맑은 고딕"/>
               </a:rPr>
-              <a:t>테이블: 요약 카드 + 한 줄 요약(card_line, 80자 이내)</a:t>
+              <a:t>업무 영역 설명 + 테이블마다 용도(없으면 코멘트) 한 줄을 보고</a:t>
             </a:r>
           </a:p>
           <a:p>
@@ -10281,7 +9746,7 @@
                 <a:latin typeface="맑은 고딕"/>
                 <a:ea typeface="맑은 고딕"/>
               </a:rPr>
-              <a:t>지표: 설명 정비 · 예시 질문 3~5개 · 동의어</a:t>
+              <a:t>3~5개와 이유 — 놓치지 않기 우선</a:t>
             </a:r>
           </a:p>
         </p:txBody>
@@ -10294,7 +9759,7 @@
         </p:nvSpPr>
         <p:spPr>
           <a:xfrm>
-            <a:off x="4965700" y="3670300"/>
+            <a:off x="4965700" y="3060700"/>
             <a:ext cx="355600" cy="177800"/>
           </a:xfrm>
           <a:prstGeom prst="roundRect">
@@ -10348,7 +9813,7 @@
         </p:nvSpPr>
         <p:spPr>
           <a:xfrm>
-            <a:off x="4229100" y="3670300"/>
+            <a:off x="4229100" y="3060700"/>
             <a:ext cx="355600" cy="177800"/>
           </a:xfrm>
           <a:prstGeom prst="roundRect">
@@ -10402,8 +9867,8 @@
         </p:nvCxnSpPr>
         <p:spPr>
           <a:xfrm>
-            <a:off x="3111500" y="4495800"/>
-            <a:ext cx="0" cy="330200"/>
+            <a:off x="3111500" y="3810000"/>
+            <a:ext cx="0" cy="228600"/>
           </a:xfrm>
           <a:prstGeom prst="line">
             <a:avLst/>
@@ -10438,8 +9903,8 @@
         </p:nvSpPr>
         <p:spPr>
           <a:xfrm>
-            <a:off x="825500" y="4826000"/>
-            <a:ext cx="4572000" cy="1219200"/>
+            <a:off x="825500" y="4038600"/>
+            <a:ext cx="4572000" cy="787400"/>
           </a:xfrm>
           <a:prstGeom prst="diamond">
             <a:avLst/>
@@ -10481,33 +9946,7 @@
                 <a:latin typeface="맑은 고딕"/>
                 <a:ea typeface="맑은 고딕"/>
               </a:rPr>
-              <a:t>형식 검증</a:t>
-            </a:r>
-          </a:p>
-          <a:p>
-            <a:pPr algn="ctr"/>
-            <a:r>
-              <a:rPr sz="950" b="0">
-                <a:solidFill>
-                  <a:srgbClr val="64748B"/>
-                </a:solidFill>
-                <a:latin typeface="맑은 고딕"/>
-                <a:ea typeface="맑은 고딕"/>
-              </a:rPr>
-              <a:t>JSON 형식 · 없는 테이블/컬럼 언급</a:t>
-            </a:r>
-          </a:p>
-          <a:p>
-            <a:pPr algn="ctr"/>
-            <a:r>
-              <a:rPr sz="950" b="0">
-                <a:solidFill>
-                  <a:srgbClr val="64748B"/>
-                </a:solidFill>
-                <a:latin typeface="맑은 고딕"/>
-                <a:ea typeface="맑은 고딕"/>
-              </a:rPr>
-              <a:t>예시 질문이 지표 이름을 베꼈나</a:t>
+              <a:t>후보 테이블이 있나</a:t>
             </a:r>
           </a:p>
         </p:txBody>
@@ -10520,8 +9959,8 @@
         </p:nvSpPr>
         <p:spPr>
           <a:xfrm>
-            <a:off x="5994400" y="5054600"/>
-            <a:ext cx="3111500" cy="762000"/>
+            <a:off x="5994400" y="4140200"/>
+            <a:ext cx="3111500" cy="584200"/>
           </a:xfrm>
           <a:prstGeom prst="parallelogram">
             <a:avLst/>
@@ -10563,7 +10002,7 @@
                 <a:latin typeface="맑은 고딕"/>
                 <a:ea typeface="맑은 고딕"/>
               </a:rPr>
-              <a:t>재생성</a:t>
+              <a:t>되묻기</a:t>
             </a:r>
           </a:p>
           <a:p>
@@ -10576,20 +10015,7 @@
                 <a:latin typeface="맑은 고딕"/>
                 <a:ea typeface="맑은 고딕"/>
               </a:rPr>
-              <a:t>실패 이유를 붙여 다시 생성</a:t>
-            </a:r>
-          </a:p>
-          <a:p>
-            <a:pPr algn="ctr"/>
-            <a:r>
-              <a:rPr sz="950" b="0">
-                <a:solidFill>
-                  <a:srgbClr val="7F1D1D"/>
-                </a:solidFill>
-                <a:latin typeface="맑은 고딕"/>
-                <a:ea typeface="맑은 고딕"/>
-              </a:rPr>
-              <a:t>2회 넘게 실패하면 failed</a:t>
+              <a:t>업무 영역 안내 + 질문 다시</a:t>
             </a:r>
           </a:p>
         </p:txBody>
@@ -10602,7 +10028,7 @@
         </p:nvCxnSpPr>
         <p:spPr>
           <a:xfrm>
-            <a:off x="5397500" y="5435600"/>
+            <a:off x="5397500" y="4432300"/>
             <a:ext cx="774700" cy="0"/>
           </a:xfrm>
           <a:prstGeom prst="line">
@@ -10638,7 +10064,7 @@
         </p:nvSpPr>
         <p:spPr>
           <a:xfrm>
-            <a:off x="5422900" y="5245100"/>
+            <a:off x="5422900" y="4241800"/>
             <a:ext cx="546100" cy="152400"/>
           </a:xfrm>
           <a:prstGeom prst="rect">
@@ -10661,7 +10087,7 @@
                 <a:latin typeface="맑은 고딕"/>
                 <a:ea typeface="맑은 고딕"/>
               </a:rPr>
-              <a:t>실패</a:t>
+              <a:t>없음</a:t>
             </a:r>
           </a:p>
         </p:txBody>
@@ -10674,8 +10100,8 @@
         </p:nvCxnSpPr>
         <p:spPr>
           <a:xfrm>
-            <a:off x="3111500" y="6045200"/>
-            <a:ext cx="0" cy="330200"/>
+            <a:off x="3111500" y="4826000"/>
+            <a:ext cx="0" cy="228600"/>
           </a:xfrm>
           <a:prstGeom prst="line">
             <a:avLst/>
@@ -10710,7 +10136,7 @@
         </p:nvSpPr>
         <p:spPr>
           <a:xfrm>
-            <a:off x="1892300" y="6140450"/>
+            <a:off x="1892300" y="4870450"/>
             <a:ext cx="1143000" cy="139700"/>
           </a:xfrm>
           <a:prstGeom prst="rect">
@@ -10733,7 +10159,7 @@
                 <a:latin typeface="맑은 고딕"/>
                 <a:ea typeface="맑은 고딕"/>
               </a:rPr>
-              <a:t>통과</a:t>
+              <a:t>있음</a:t>
             </a:r>
           </a:p>
         </p:txBody>
@@ -10746,8 +10172,8 @@
         </p:nvSpPr>
         <p:spPr>
           <a:xfrm>
-            <a:off x="825500" y="6375400"/>
-            <a:ext cx="4572000" cy="635000"/>
+            <a:off x="825500" y="5054600"/>
+            <a:ext cx="4572000" cy="660400"/>
           </a:xfrm>
           <a:prstGeom prst="parallelogram">
             <a:avLst/>
@@ -10789,7 +10215,7 @@
                 <a:latin typeface="맑은 고딕"/>
                 <a:ea typeface="맑은 고딕"/>
               </a:rPr>
-              <a:t>초안 저장</a:t>
+              <a:t>지표 후보 조회</a:t>
             </a:r>
           </a:p>
           <a:p>
@@ -10802,21 +10228,88 @@
                 <a:latin typeface="맑은 고딕"/>
                 <a:ea typeface="맑은 고딕"/>
               </a:rPr>
-              <a:t>card_status = draft · metric_example.status = draft</a:t>
+              <a:t>metric_table 로 조회 (검색 아님)</a:t>
+            </a:r>
+          </a:p>
+          <a:p>
+            <a:pPr algn="ctr"/>
+            <a:r>
+              <a:rPr sz="950" b="0">
+                <a:solidFill>
+                  <a:srgbClr val="64748B"/>
+                </a:solidFill>
+                <a:latin typeface="맑은 고딕"/>
+                <a:ea typeface="맑은 고딕"/>
+              </a:rPr>
+              <a:t>조인 지표 포함 · active 만</a:t>
+            </a:r>
+          </a:p>
+        </p:txBody>
+      </p:sp>
+      <p:sp>
+        <p:nvSpPr>
+          <p:cNvPr id="20" name="Rounded Rectangle 19"/>
+          <p:cNvSpPr/>
+          <p:nvPr/>
+        </p:nvSpPr>
+        <p:spPr>
+          <a:xfrm>
+            <a:off x="4965700" y="5041900"/>
+            <a:ext cx="355600" cy="177800"/>
+          </a:xfrm>
+          <a:prstGeom prst="roundRect">
+            <a:avLst/>
+          </a:prstGeom>
+          <a:solidFill>
+            <a:srgbClr val="D96C06"/>
+          </a:solidFill>
+          <a:ln>
+            <a:noFill/>
+          </a:ln>
+          <a:effectLst/>
+        </p:spPr>
+        <p:style>
+          <a:lnRef idx="1">
+            <a:schemeClr val="accent1"/>
+          </a:lnRef>
+          <a:fillRef idx="3">
+            <a:schemeClr val="accent1"/>
+          </a:fillRef>
+          <a:effectRef idx="2">
+            <a:schemeClr val="accent1"/>
+          </a:effectRef>
+          <a:fontRef idx="minor">
+            <a:schemeClr val="lt1"/>
+          </a:fontRef>
+        </p:style>
+        <p:txBody>
+          <a:bodyPr rtlCol="0" anchor="ctr" lIns="0" rIns="0" tIns="0" bIns="0"/>
+          <a:lstStyle/>
+          <a:p>
+            <a:pPr algn="ctr"/>
+            <a:r>
+              <a:rPr sz="750" b="1">
+                <a:solidFill>
+                  <a:srgbClr val="FFFFFF"/>
+                </a:solidFill>
+                <a:latin typeface="맑은 고딕"/>
+                <a:ea typeface="맑은 고딕"/>
+              </a:rPr>
+              <a:t>NEW</a:t>
             </a:r>
           </a:p>
         </p:txBody>
       </p:sp>
       <p:cxnSp>
         <p:nvCxnSpPr>
-          <p:cNvPr id="20" name="Connector 19"/>
+          <p:cNvPr id="21" name="Connector 20"/>
           <p:cNvCxnSpPr/>
           <p:nvPr/>
         </p:nvCxnSpPr>
         <p:spPr>
           <a:xfrm>
-            <a:off x="3111500" y="7010400"/>
-            <a:ext cx="0" cy="330200"/>
+            <a:off x="3111500" y="5715000"/>
+            <a:ext cx="0" cy="228600"/>
           </a:xfrm>
           <a:prstGeom prst="line">
             <a:avLst/>
@@ -10845,1480 +10338,14 @@
       </p:cxnSp>
       <p:sp>
         <p:nvSpPr>
-          <p:cNvPr id="21" name="Diamond 20"/>
+          <p:cNvPr id="22" name="Rectangle 21"/>
           <p:cNvSpPr/>
           <p:nvPr/>
         </p:nvSpPr>
         <p:spPr>
           <a:xfrm>
-            <a:off x="825500" y="7340600"/>
-            <a:ext cx="4572000" cy="1066800"/>
-          </a:xfrm>
-          <a:prstGeom prst="diamond">
-            <a:avLst/>
-          </a:prstGeom>
-          <a:solidFill>
-            <a:srgbClr val="FFFBEB"/>
-          </a:solidFill>
-          <a:ln w="12700">
-            <a:solidFill>
-              <a:srgbClr val="FBBF24"/>
-            </a:solidFill>
-          </a:ln>
-          <a:effectLst/>
-        </p:spPr>
-        <p:style>
-          <a:lnRef idx="1">
-            <a:schemeClr val="accent1"/>
-          </a:lnRef>
-          <a:fillRef idx="3">
-            <a:schemeClr val="accent1"/>
-          </a:fillRef>
-          <a:effectRef idx="2">
-            <a:schemeClr val="accent1"/>
-          </a:effectRef>
-          <a:fontRef idx="minor">
-            <a:schemeClr val="lt1"/>
-          </a:fontRef>
-        </p:style>
-        <p:txBody>
-          <a:bodyPr rtlCol="0" anchor="ctr" wrap="square" lIns="0" rIns="0" tIns="25400" bIns="25400"/>
-          <a:lstStyle/>
-          <a:p>
-            <a:pPr algn="ctr"/>
-            <a:r>
-              <a:rPr sz="1250" b="1">
-                <a:solidFill>
-                  <a:srgbClr val="1E293B"/>
-                </a:solidFill>
-                <a:latin typeface="맑은 고딕"/>
-                <a:ea typeface="맑은 고딕"/>
-              </a:rPr>
-              <a:t>사람 검수</a:t>
-            </a:r>
-          </a:p>
-          <a:p>
-            <a:pPr algn="ctr"/>
-            <a:r>
-              <a:rPr sz="950" b="0">
-                <a:solidFill>
-                  <a:srgbClr val="64748B"/>
-                </a:solidFill>
-                <a:latin typeface="맑은 고딕"/>
-                <a:ea typeface="맑은 고딕"/>
-              </a:rPr>
-              <a:t>시스템 담당자 · 일괄 승인 가능</a:t>
-            </a:r>
-          </a:p>
-        </p:txBody>
-      </p:sp>
-      <p:sp>
-        <p:nvSpPr>
-          <p:cNvPr id="22" name="Parallelogram 21"/>
-          <p:cNvSpPr/>
-          <p:nvPr/>
-        </p:nvSpPr>
-        <p:spPr>
-          <a:xfrm>
-            <a:off x="5994400" y="7505700"/>
-            <a:ext cx="3111500" cy="736600"/>
-          </a:xfrm>
-          <a:prstGeom prst="parallelogram">
-            <a:avLst/>
-          </a:prstGeom>
-          <a:solidFill>
-            <a:srgbClr val="ECFDF5"/>
-          </a:solidFill>
-          <a:ln w="12700">
-            <a:solidFill>
-              <a:srgbClr val="34D399"/>
-            </a:solidFill>
-          </a:ln>
-          <a:effectLst/>
-        </p:spPr>
-        <p:style>
-          <a:lnRef idx="1">
-            <a:schemeClr val="accent1"/>
-          </a:lnRef>
-          <a:fillRef idx="3">
-            <a:schemeClr val="accent1"/>
-          </a:fillRef>
-          <a:effectRef idx="2">
-            <a:schemeClr val="accent1"/>
-          </a:effectRef>
-          <a:fontRef idx="minor">
-            <a:schemeClr val="lt1"/>
-          </a:fontRef>
-        </p:style>
-        <p:txBody>
-          <a:bodyPr rtlCol="0" anchor="ctr" wrap="square" lIns="279400" rIns="279400" tIns="25400" bIns="25400"/>
-          <a:lstStyle/>
-          <a:p>
-            <a:pPr algn="ctr"/>
-            <a:r>
-              <a:rPr sz="1250" b="1">
-                <a:solidFill>
-                  <a:srgbClr val="1E293B"/>
-                </a:solidFill>
-                <a:latin typeface="맑은 고딕"/>
-                <a:ea typeface="맑은 고딕"/>
-              </a:rPr>
-              <a:t>반려</a:t>
-            </a:r>
-          </a:p>
-          <a:p>
-            <a:pPr algn="ctr"/>
-            <a:r>
-              <a:rPr sz="950" b="0">
-                <a:solidFill>
-                  <a:srgbClr val="64748B"/>
-                </a:solidFill>
-                <a:latin typeface="맑은 고딕"/>
-                <a:ea typeface="맑은 고딕"/>
-              </a:rPr>
-              <a:t>사유와 함께 대기열로</a:t>
-            </a:r>
-          </a:p>
-          <a:p>
-            <a:pPr algn="ctr"/>
-            <a:r>
-              <a:rPr sz="950" b="0">
-                <a:solidFill>
-                  <a:srgbClr val="64748B"/>
-                </a:solidFill>
-                <a:latin typeface="맑은 고딕"/>
-                <a:ea typeface="맑은 고딕"/>
-              </a:rPr>
-              <a:t>enrich_job (rejected)</a:t>
-            </a:r>
-          </a:p>
-        </p:txBody>
-      </p:sp>
-      <p:cxnSp>
-        <p:nvCxnSpPr>
-          <p:cNvPr id="23" name="Connector 22"/>
-          <p:cNvCxnSpPr/>
-          <p:nvPr/>
-        </p:nvCxnSpPr>
-        <p:spPr>
-          <a:xfrm>
-            <a:off x="5397500" y="7874000"/>
-            <a:ext cx="774700" cy="0"/>
-          </a:xfrm>
-          <a:prstGeom prst="line">
-            <a:avLst/>
-          </a:prstGeom>
-          <a:ln w="13970">
-            <a:solidFill>
-              <a:srgbClr val="94A3B8"/>
-            </a:solidFill>
-            <a:tailEnd type="triangle" w="med" len="med"/>
-          </a:ln>
-        </p:spPr>
-        <p:style>
-          <a:lnRef idx="2">
-            <a:schemeClr val="accent1"/>
-          </a:lnRef>
-          <a:fillRef idx="0">
-            <a:schemeClr val="accent1"/>
-          </a:fillRef>
-          <a:effectRef idx="1">
-            <a:schemeClr val="accent1"/>
-          </a:effectRef>
-          <a:fontRef idx="minor">
-            <a:schemeClr val="tx1"/>
-          </a:fontRef>
-        </p:style>
-      </p:cxnSp>
-      <p:sp>
-        <p:nvSpPr>
-          <p:cNvPr id="24" name="TextBox 23"/>
-          <p:cNvSpPr txBox="1"/>
-          <p:nvPr/>
-        </p:nvSpPr>
-        <p:spPr>
-          <a:xfrm>
-            <a:off x="5422900" y="7683500"/>
-            <a:ext cx="546100" cy="152400"/>
-          </a:xfrm>
-          <a:prstGeom prst="rect">
-            <a:avLst/>
-          </a:prstGeom>
-          <a:noFill/>
-        </p:spPr>
-        <p:txBody>
-          <a:bodyPr wrap="square" anchor="t" lIns="0" rIns="0" tIns="0" bIns="0">
-            <a:spAutoFit/>
-          </a:bodyPr>
-          <a:lstStyle/>
-          <a:p>
-            <a:pPr algn="ctr"/>
-            <a:r>
-              <a:rPr sz="850" b="0">
-                <a:solidFill>
-                  <a:srgbClr val="94A3B8"/>
-                </a:solidFill>
-                <a:latin typeface="맑은 고딕"/>
-                <a:ea typeface="맑은 고딕"/>
-              </a:rPr>
-              <a:t>반려</a:t>
-            </a:r>
-          </a:p>
-        </p:txBody>
-      </p:sp>
-      <p:cxnSp>
-        <p:nvCxnSpPr>
-          <p:cNvPr id="25" name="Connector 24"/>
-          <p:cNvCxnSpPr/>
-          <p:nvPr/>
-        </p:nvCxnSpPr>
-        <p:spPr>
-          <a:xfrm>
-            <a:off x="3111500" y="8407400"/>
-            <a:ext cx="0" cy="330200"/>
-          </a:xfrm>
-          <a:prstGeom prst="line">
-            <a:avLst/>
-          </a:prstGeom>
-          <a:ln w="13970">
-            <a:solidFill>
-              <a:srgbClr val="94A3B8"/>
-            </a:solidFill>
-            <a:tailEnd type="triangle" w="med" len="med"/>
-          </a:ln>
-        </p:spPr>
-        <p:style>
-          <a:lnRef idx="2">
-            <a:schemeClr val="accent1"/>
-          </a:lnRef>
-          <a:fillRef idx="0">
-            <a:schemeClr val="accent1"/>
-          </a:fillRef>
-          <a:effectRef idx="1">
-            <a:schemeClr val="accent1"/>
-          </a:effectRef>
-          <a:fontRef idx="minor">
-            <a:schemeClr val="tx1"/>
-          </a:fontRef>
-        </p:style>
-      </p:cxnSp>
-      <p:sp>
-        <p:nvSpPr>
-          <p:cNvPr id="26" name="TextBox 25"/>
-          <p:cNvSpPr txBox="1"/>
-          <p:nvPr/>
-        </p:nvSpPr>
-        <p:spPr>
-          <a:xfrm>
-            <a:off x="1892300" y="8502650"/>
-            <a:ext cx="1143000" cy="139700"/>
-          </a:xfrm>
-          <a:prstGeom prst="rect">
-            <a:avLst/>
-          </a:prstGeom>
-          <a:noFill/>
-        </p:spPr>
-        <p:txBody>
-          <a:bodyPr wrap="square" anchor="t" lIns="0" rIns="0" tIns="0" bIns="0">
-            <a:spAutoFit/>
-          </a:bodyPr>
-          <a:lstStyle/>
-          <a:p>
-            <a:pPr algn="r"/>
-            <a:r>
-              <a:rPr sz="800" b="0">
-                <a:solidFill>
-                  <a:srgbClr val="94A3B8"/>
-                </a:solidFill>
-                <a:latin typeface="맑은 고딕"/>
-                <a:ea typeface="맑은 고딕"/>
-              </a:rPr>
-              <a:t>승인</a:t>
-            </a:r>
-          </a:p>
-        </p:txBody>
-      </p:sp>
-      <p:sp>
-        <p:nvSpPr>
-          <p:cNvPr id="27" name="Parallelogram 26"/>
-          <p:cNvSpPr/>
-          <p:nvPr/>
-        </p:nvSpPr>
-        <p:spPr>
-          <a:xfrm>
-            <a:off x="825500" y="8737600"/>
-            <a:ext cx="4572000" cy="762000"/>
-          </a:xfrm>
-          <a:prstGeom prst="parallelogram">
-            <a:avLst/>
-          </a:prstGeom>
-          <a:solidFill>
-            <a:srgbClr val="ECFDF5"/>
-          </a:solidFill>
-          <a:ln w="12700">
-            <a:solidFill>
-              <a:srgbClr val="34D399"/>
-            </a:solidFill>
-          </a:ln>
-          <a:effectLst/>
-        </p:spPr>
-        <p:style>
-          <a:lnRef idx="1">
-            <a:schemeClr val="accent1"/>
-          </a:lnRef>
-          <a:fillRef idx="3">
-            <a:schemeClr val="accent1"/>
-          </a:fillRef>
-          <a:effectRef idx="2">
-            <a:schemeClr val="accent1"/>
-          </a:effectRef>
-          <a:fontRef idx="minor">
-            <a:schemeClr val="lt1"/>
-          </a:fontRef>
-        </p:style>
-        <p:txBody>
-          <a:bodyPr rtlCol="0" anchor="ctr" wrap="square" lIns="279400" rIns="279400" tIns="25400" bIns="25400"/>
-          <a:lstStyle/>
-          <a:p>
-            <a:pPr algn="ctr"/>
-            <a:r>
-              <a:rPr sz="1250" b="1">
-                <a:solidFill>
-                  <a:srgbClr val="1E293B"/>
-                </a:solidFill>
-                <a:latin typeface="맑은 고딕"/>
-                <a:ea typeface="맑은 고딕"/>
-              </a:rPr>
-              <a:t>승인 반영</a:t>
-            </a:r>
-          </a:p>
-          <a:p>
-            <a:pPr algn="ctr"/>
-            <a:r>
-              <a:rPr sz="950" b="0">
-                <a:solidFill>
-                  <a:srgbClr val="64748B"/>
-                </a:solidFill>
-                <a:latin typeface="맑은 고딕"/>
-                <a:ea typeface="맑은 고딕"/>
-              </a:rPr>
-              <a:t>card_status = approved · 예시 approved</a:t>
-            </a:r>
-          </a:p>
-          <a:p>
-            <a:pPr algn="ctr"/>
-            <a:r>
-              <a:rPr sz="950" b="0">
-                <a:solidFill>
-                  <a:srgbClr val="64748B"/>
-                </a:solidFill>
-                <a:latin typeface="맑은 고딕"/>
-                <a:ea typeface="맑은 고딕"/>
-              </a:rPr>
-              <a:t>지표 status = active (질문에 쓰이기 시작)</a:t>
-            </a:r>
-          </a:p>
-        </p:txBody>
-      </p:sp>
-      <p:cxnSp>
-        <p:nvCxnSpPr>
-          <p:cNvPr id="28" name="Connector 27"/>
-          <p:cNvCxnSpPr/>
-          <p:nvPr/>
-        </p:nvCxnSpPr>
-        <p:spPr>
-          <a:xfrm>
-            <a:off x="3111500" y="9499600"/>
-            <a:ext cx="0" cy="330200"/>
-          </a:xfrm>
-          <a:prstGeom prst="line">
-            <a:avLst/>
-          </a:prstGeom>
-          <a:ln w="13970">
-            <a:solidFill>
-              <a:srgbClr val="94A3B8"/>
-            </a:solidFill>
-            <a:tailEnd type="triangle" w="med" len="med"/>
-          </a:ln>
-        </p:spPr>
-        <p:style>
-          <a:lnRef idx="2">
-            <a:schemeClr val="accent1"/>
-          </a:lnRef>
-          <a:fillRef idx="0">
-            <a:schemeClr val="accent1"/>
-          </a:fillRef>
-          <a:effectRef idx="1">
-            <a:schemeClr val="accent1"/>
-          </a:effectRef>
-          <a:fontRef idx="minor">
-            <a:schemeClr val="tx1"/>
-          </a:fontRef>
-        </p:style>
-      </p:cxnSp>
-      <p:sp>
-        <p:nvSpPr>
-          <p:cNvPr id="29" name="Oval 28"/>
-          <p:cNvSpPr/>
-          <p:nvPr/>
-        </p:nvSpPr>
-        <p:spPr>
-          <a:xfrm>
-            <a:off x="825500" y="9829800"/>
-            <a:ext cx="4572000" cy="406400"/>
-          </a:xfrm>
-          <a:prstGeom prst="ellipse">
-            <a:avLst/>
-          </a:prstGeom>
-          <a:solidFill>
-            <a:srgbClr val="E0E7FF"/>
-          </a:solidFill>
-          <a:ln w="12700">
-            <a:solidFill>
-              <a:srgbClr val="818CF8"/>
-            </a:solidFill>
-          </a:ln>
-          <a:effectLst/>
-        </p:spPr>
-        <p:style>
-          <a:lnRef idx="1">
-            <a:schemeClr val="accent1"/>
-          </a:lnRef>
-          <a:fillRef idx="3">
-            <a:schemeClr val="accent1"/>
-          </a:fillRef>
-          <a:effectRef idx="2">
-            <a:schemeClr val="accent1"/>
-          </a:effectRef>
-          <a:fontRef idx="minor">
-            <a:schemeClr val="lt1"/>
-          </a:fontRef>
-        </p:style>
-        <p:txBody>
-          <a:bodyPr rtlCol="0" anchor="ctr" wrap="square" lIns="127000" rIns="127000" tIns="25400" bIns="25400"/>
-          <a:lstStyle/>
-          <a:p>
-            <a:pPr algn="ctr"/>
-            <a:r>
-              <a:rPr sz="1250" b="1">
-                <a:solidFill>
-                  <a:srgbClr val="1E293B"/>
-                </a:solidFill>
-                <a:latin typeface="맑은 고딕"/>
-                <a:ea typeface="맑은 고딕"/>
-              </a:rPr>
-              <a:t>종료</a:t>
-            </a:r>
-          </a:p>
-        </p:txBody>
-      </p:sp>
-      <p:sp>
-        <p:nvSpPr>
-          <p:cNvPr id="30" name="Rectangle 29"/>
-          <p:cNvSpPr/>
-          <p:nvPr/>
-        </p:nvSpPr>
-        <p:spPr>
-          <a:xfrm>
-            <a:off x="825500" y="11341100"/>
-            <a:ext cx="8280400" cy="635000"/>
-          </a:xfrm>
-          <a:prstGeom prst="rect">
-            <a:avLst/>
-          </a:prstGeom>
-          <a:solidFill>
-            <a:srgbClr val="F8FAFC"/>
-          </a:solidFill>
-          <a:ln w="12700">
-            <a:solidFill>
-              <a:srgbClr val="CBD5E1"/>
-            </a:solidFill>
-          </a:ln>
-          <a:effectLst/>
-        </p:spPr>
-        <p:style>
-          <a:lnRef idx="1">
-            <a:schemeClr val="accent1"/>
-          </a:lnRef>
-          <a:fillRef idx="3">
-            <a:schemeClr val="accent1"/>
-          </a:fillRef>
-          <a:effectRef idx="2">
-            <a:schemeClr val="accent1"/>
-          </a:effectRef>
-          <a:fontRef idx="minor">
-            <a:schemeClr val="lt1"/>
-          </a:fontRef>
-        </p:style>
-        <p:txBody>
-          <a:bodyPr rtlCol="0" anchor="ctr" wrap="square" lIns="127000" rIns="127000" tIns="25400" bIns="25400"/>
-          <a:lstStyle/>
-          <a:p>
-            <a:pPr algn="ctr"/>
-          </a:p>
-        </p:txBody>
-      </p:sp>
-      <p:sp>
-        <p:nvSpPr>
-          <p:cNvPr id="31" name="TextBox 30"/>
-          <p:cNvSpPr txBox="1"/>
-          <p:nvPr/>
-        </p:nvSpPr>
-        <p:spPr>
-          <a:xfrm>
-            <a:off x="1016000" y="11442700"/>
-            <a:ext cx="7899400" cy="457200"/>
-          </a:xfrm>
-          <a:prstGeom prst="rect">
-            <a:avLst/>
-          </a:prstGeom>
-          <a:noFill/>
-        </p:spPr>
-        <p:txBody>
-          <a:bodyPr wrap="square" anchor="ctr" lIns="0" rIns="0" tIns="0" bIns="0">
-            <a:spAutoFit/>
-          </a:bodyPr>
-          <a:lstStyle/>
-          <a:p>
-            <a:pPr algn="l"/>
-            <a:r>
-              <a:rPr sz="1000" b="0">
-                <a:solidFill>
-                  <a:srgbClr val="64748B"/>
-                </a:solidFill>
-                <a:latin typeface="맑은 고딕"/>
-                <a:ea typeface="맑은 고딕"/>
-              </a:rPr>
-              <a:t>테이블 카드와 지표마다의 예시 질문을 사람이 다 쓰기는 어렵다 — 초안은 LLM, 책임은 사람. 예시 질문은 지표 이름·설명의 단어를 피하고 구어체·줄임말·다른 업무 용어를 섞는다. 평가 문항(eval_case)은 따로 만든다 — 예시 질문으로 평가하면 점수가 부풀려진다.</a:t>
-            </a:r>
-          </a:p>
-        </p:txBody>
-      </p:sp>
-      <p:sp>
-        <p:nvSpPr>
-          <p:cNvPr id="32" name="Oval 31"/>
-          <p:cNvSpPr/>
-          <p:nvPr/>
-        </p:nvSpPr>
-        <p:spPr>
-          <a:xfrm>
-            <a:off x="825500" y="12179300"/>
-            <a:ext cx="241300" cy="177800"/>
-          </a:xfrm>
-          <a:prstGeom prst="ellipse">
-            <a:avLst/>
-          </a:prstGeom>
-          <a:solidFill>
-            <a:srgbClr val="E0E7FF"/>
-          </a:solidFill>
-          <a:ln>
-            <a:solidFill>
-              <a:srgbClr val="818CF8"/>
-            </a:solidFill>
-          </a:ln>
-          <a:effectLst/>
-        </p:spPr>
-        <p:style>
-          <a:lnRef idx="1">
-            <a:schemeClr val="accent1"/>
-          </a:lnRef>
-          <a:fillRef idx="3">
-            <a:schemeClr val="accent1"/>
-          </a:fillRef>
-          <a:effectRef idx="2">
-            <a:schemeClr val="accent1"/>
-          </a:effectRef>
-          <a:fontRef idx="minor">
-            <a:schemeClr val="lt1"/>
-          </a:fontRef>
-        </p:style>
-        <p:txBody>
-          <a:bodyPr rtlCol="0" anchor="ctr"/>
-          <a:lstStyle/>
-          <a:p>
-            <a:pPr algn="ctr"/>
-          </a:p>
-        </p:txBody>
-      </p:sp>
-      <p:sp>
-        <p:nvSpPr>
-          <p:cNvPr id="33" name="TextBox 32"/>
-          <p:cNvSpPr txBox="1"/>
-          <p:nvPr/>
-        </p:nvSpPr>
-        <p:spPr>
-          <a:xfrm>
-            <a:off x="1117600" y="12179300"/>
-            <a:ext cx="1016000" cy="177800"/>
-          </a:xfrm>
-          <a:prstGeom prst="rect">
-            <a:avLst/>
-          </a:prstGeom>
-          <a:noFill/>
-        </p:spPr>
-        <p:txBody>
-          <a:bodyPr wrap="square" anchor="t" lIns="0" rIns="0" tIns="0" bIns="0">
-            <a:spAutoFit/>
-          </a:bodyPr>
-          <a:lstStyle/>
-          <a:p>
-            <a:pPr algn="l"/>
-            <a:r>
-              <a:rPr sz="900" b="0">
-                <a:solidFill>
-                  <a:srgbClr val="475569"/>
-                </a:solidFill>
-                <a:latin typeface="맑은 고딕"/>
-                <a:ea typeface="맑은 고딕"/>
-              </a:rPr>
-              <a:t>시작 · 종료</a:t>
-            </a:r>
-          </a:p>
-        </p:txBody>
-      </p:sp>
-      <p:sp>
-        <p:nvSpPr>
-          <p:cNvPr id="34" name="Rectangle 33"/>
-          <p:cNvSpPr/>
-          <p:nvPr/>
-        </p:nvSpPr>
-        <p:spPr>
-          <a:xfrm>
-            <a:off x="2197100" y="12179300"/>
-            <a:ext cx="241300" cy="177800"/>
-          </a:xfrm>
-          <a:prstGeom prst="rect">
-            <a:avLst/>
-          </a:prstGeom>
-          <a:solidFill>
-            <a:srgbClr val="EFF6FF"/>
-          </a:solidFill>
-          <a:ln>
-            <a:solidFill>
-              <a:srgbClr val="60A5FA"/>
-            </a:solidFill>
-          </a:ln>
-          <a:effectLst/>
-        </p:spPr>
-        <p:style>
-          <a:lnRef idx="1">
-            <a:schemeClr val="accent1"/>
-          </a:lnRef>
-          <a:fillRef idx="3">
-            <a:schemeClr val="accent1"/>
-          </a:fillRef>
-          <a:effectRef idx="2">
-            <a:schemeClr val="accent1"/>
-          </a:effectRef>
-          <a:fontRef idx="minor">
-            <a:schemeClr val="lt1"/>
-          </a:fontRef>
-        </p:style>
-        <p:txBody>
-          <a:bodyPr rtlCol="0" anchor="ctr"/>
-          <a:lstStyle/>
-          <a:p>
-            <a:pPr algn="ctr"/>
-          </a:p>
-        </p:txBody>
-      </p:sp>
-      <p:sp>
-        <p:nvSpPr>
-          <p:cNvPr id="35" name="TextBox 34"/>
-          <p:cNvSpPr txBox="1"/>
-          <p:nvPr/>
-        </p:nvSpPr>
-        <p:spPr>
-          <a:xfrm>
-            <a:off x="2489200" y="12179300"/>
-            <a:ext cx="1016000" cy="177800"/>
-          </a:xfrm>
-          <a:prstGeom prst="rect">
-            <a:avLst/>
-          </a:prstGeom>
-          <a:noFill/>
-        </p:spPr>
-        <p:txBody>
-          <a:bodyPr wrap="square" anchor="t" lIns="0" rIns="0" tIns="0" bIns="0">
-            <a:spAutoFit/>
-          </a:bodyPr>
-          <a:lstStyle/>
-          <a:p>
-            <a:pPr algn="l"/>
-            <a:r>
-              <a:rPr sz="900" b="0">
-                <a:solidFill>
-                  <a:srgbClr val="475569"/>
-                </a:solidFill>
-                <a:latin typeface="맑은 고딕"/>
-                <a:ea typeface="맑은 고딕"/>
-              </a:rPr>
-              <a:t>처리</a:t>
-            </a:r>
-          </a:p>
-        </p:txBody>
-      </p:sp>
-      <p:sp>
-        <p:nvSpPr>
-          <p:cNvPr id="36" name="Diamond 35"/>
-          <p:cNvSpPr/>
-          <p:nvPr/>
-        </p:nvSpPr>
-        <p:spPr>
-          <a:xfrm>
-            <a:off x="3568700" y="12179300"/>
-            <a:ext cx="241300" cy="177800"/>
-          </a:xfrm>
-          <a:prstGeom prst="diamond">
-            <a:avLst/>
-          </a:prstGeom>
-          <a:solidFill>
-            <a:srgbClr val="FFFBEB"/>
-          </a:solidFill>
-          <a:ln>
-            <a:solidFill>
-              <a:srgbClr val="FBBF24"/>
-            </a:solidFill>
-          </a:ln>
-          <a:effectLst/>
-        </p:spPr>
-        <p:style>
-          <a:lnRef idx="1">
-            <a:schemeClr val="accent1"/>
-          </a:lnRef>
-          <a:fillRef idx="3">
-            <a:schemeClr val="accent1"/>
-          </a:fillRef>
-          <a:effectRef idx="2">
-            <a:schemeClr val="accent1"/>
-          </a:effectRef>
-          <a:fontRef idx="minor">
-            <a:schemeClr val="lt1"/>
-          </a:fontRef>
-        </p:style>
-        <p:txBody>
-          <a:bodyPr rtlCol="0" anchor="ctr"/>
-          <a:lstStyle/>
-          <a:p>
-            <a:pPr algn="ctr"/>
-          </a:p>
-        </p:txBody>
-      </p:sp>
-      <p:sp>
-        <p:nvSpPr>
-          <p:cNvPr id="37" name="TextBox 36"/>
-          <p:cNvSpPr txBox="1"/>
-          <p:nvPr/>
-        </p:nvSpPr>
-        <p:spPr>
-          <a:xfrm>
-            <a:off x="3860800" y="12179300"/>
-            <a:ext cx="1016000" cy="177800"/>
-          </a:xfrm>
-          <a:prstGeom prst="rect">
-            <a:avLst/>
-          </a:prstGeom>
-          <a:noFill/>
-        </p:spPr>
-        <p:txBody>
-          <a:bodyPr wrap="square" anchor="t" lIns="0" rIns="0" tIns="0" bIns="0">
-            <a:spAutoFit/>
-          </a:bodyPr>
-          <a:lstStyle/>
-          <a:p>
-            <a:pPr algn="l"/>
-            <a:r>
-              <a:rPr sz="900" b="0">
-                <a:solidFill>
-                  <a:srgbClr val="475569"/>
-                </a:solidFill>
-                <a:latin typeface="맑은 고딕"/>
-                <a:ea typeface="맑은 고딕"/>
-              </a:rPr>
-              <a:t>조건</a:t>
-            </a:r>
-          </a:p>
-        </p:txBody>
-      </p:sp>
-      <p:sp>
-        <p:nvSpPr>
-          <p:cNvPr id="38" name="Parallelogram 37"/>
-          <p:cNvSpPr/>
-          <p:nvPr/>
-        </p:nvSpPr>
-        <p:spPr>
-          <a:xfrm>
-            <a:off x="4940300" y="12179300"/>
-            <a:ext cx="241300" cy="177800"/>
-          </a:xfrm>
-          <a:prstGeom prst="parallelogram">
-            <a:avLst/>
-          </a:prstGeom>
-          <a:solidFill>
-            <a:srgbClr val="ECFDF5"/>
-          </a:solidFill>
-          <a:ln>
-            <a:solidFill>
-              <a:srgbClr val="34D399"/>
-            </a:solidFill>
-          </a:ln>
-          <a:effectLst/>
-        </p:spPr>
-        <p:style>
-          <a:lnRef idx="1">
-            <a:schemeClr val="accent1"/>
-          </a:lnRef>
-          <a:fillRef idx="3">
-            <a:schemeClr val="accent1"/>
-          </a:fillRef>
-          <a:effectRef idx="2">
-            <a:schemeClr val="accent1"/>
-          </a:effectRef>
-          <a:fontRef idx="minor">
-            <a:schemeClr val="lt1"/>
-          </a:fontRef>
-        </p:style>
-        <p:txBody>
-          <a:bodyPr rtlCol="0" anchor="ctr"/>
-          <a:lstStyle/>
-          <a:p>
-            <a:pPr algn="ctr"/>
-          </a:p>
-        </p:txBody>
-      </p:sp>
-      <p:sp>
-        <p:nvSpPr>
-          <p:cNvPr id="39" name="TextBox 38"/>
-          <p:cNvSpPr txBox="1"/>
-          <p:nvPr/>
-        </p:nvSpPr>
-        <p:spPr>
-          <a:xfrm>
-            <a:off x="5232400" y="12179300"/>
-            <a:ext cx="1016000" cy="177800"/>
-          </a:xfrm>
-          <a:prstGeom prst="rect">
-            <a:avLst/>
-          </a:prstGeom>
-          <a:noFill/>
-        </p:spPr>
-        <p:txBody>
-          <a:bodyPr wrap="square" anchor="t" lIns="0" rIns="0" tIns="0" bIns="0">
-            <a:spAutoFit/>
-          </a:bodyPr>
-          <a:lstStyle/>
-          <a:p>
-            <a:pPr algn="l"/>
-            <a:r>
-              <a:rPr sz="900" b="0">
-                <a:solidFill>
-                  <a:srgbClr val="475569"/>
-                </a:solidFill>
-                <a:latin typeface="맑은 고딕"/>
-                <a:ea typeface="맑은 고딕"/>
-              </a:rPr>
-              <a:t>데이터 · 입출력</a:t>
-            </a:r>
-          </a:p>
-        </p:txBody>
-      </p:sp>
-      <p:sp>
-        <p:nvSpPr>
-          <p:cNvPr id="40" name="Parallelogram 39"/>
-          <p:cNvSpPr/>
-          <p:nvPr/>
-        </p:nvSpPr>
-        <p:spPr>
-          <a:xfrm>
-            <a:off x="6311900" y="12179300"/>
-            <a:ext cx="241300" cy="177800"/>
-          </a:xfrm>
-          <a:prstGeom prst="parallelogram">
-            <a:avLst/>
-          </a:prstGeom>
-          <a:solidFill>
-            <a:srgbClr val="FEF2F2"/>
-          </a:solidFill>
-          <a:ln>
-            <a:solidFill>
-              <a:srgbClr val="F87171"/>
-            </a:solidFill>
-          </a:ln>
-          <a:effectLst/>
-        </p:spPr>
-        <p:style>
-          <a:lnRef idx="1">
-            <a:schemeClr val="accent1"/>
-          </a:lnRef>
-          <a:fillRef idx="3">
-            <a:schemeClr val="accent1"/>
-          </a:fillRef>
-          <a:effectRef idx="2">
-            <a:schemeClr val="accent1"/>
-          </a:effectRef>
-          <a:fontRef idx="minor">
-            <a:schemeClr val="lt1"/>
-          </a:fontRef>
-        </p:style>
-        <p:txBody>
-          <a:bodyPr rtlCol="0" anchor="ctr"/>
-          <a:lstStyle/>
-          <a:p>
-            <a:pPr algn="ctr"/>
-          </a:p>
-        </p:txBody>
-      </p:sp>
-      <p:sp>
-        <p:nvSpPr>
-          <p:cNvPr id="41" name="TextBox 40"/>
-          <p:cNvSpPr txBox="1"/>
-          <p:nvPr/>
-        </p:nvSpPr>
-        <p:spPr>
-          <a:xfrm>
-            <a:off x="6604000" y="12179300"/>
-            <a:ext cx="1016000" cy="177800"/>
-          </a:xfrm>
-          <a:prstGeom prst="rect">
-            <a:avLst/>
-          </a:prstGeom>
-          <a:noFill/>
-        </p:spPr>
-        <p:txBody>
-          <a:bodyPr wrap="square" anchor="t" lIns="0" rIns="0" tIns="0" bIns="0">
-            <a:spAutoFit/>
-          </a:bodyPr>
-          <a:lstStyle/>
-          <a:p>
-            <a:pPr algn="l"/>
-            <a:r>
-              <a:rPr sz="900" b="0">
-                <a:solidFill>
-                  <a:srgbClr val="475569"/>
-                </a:solidFill>
-                <a:latin typeface="맑은 고딕"/>
-                <a:ea typeface="맑은 고딕"/>
-              </a:rPr>
-              <a:t>실패 응답</a:t>
-            </a:r>
-          </a:p>
-        </p:txBody>
-      </p:sp>
-      <p:sp>
-        <p:nvSpPr>
-          <p:cNvPr id="42" name="Rounded Rectangle 41"/>
-          <p:cNvSpPr/>
-          <p:nvPr/>
-        </p:nvSpPr>
-        <p:spPr>
-          <a:xfrm>
-            <a:off x="7785100" y="12179300"/>
-            <a:ext cx="355600" cy="177800"/>
-          </a:xfrm>
-          <a:prstGeom prst="roundRect">
-            <a:avLst/>
-          </a:prstGeom>
-          <a:solidFill>
-            <a:srgbClr val="D96C06"/>
-          </a:solidFill>
-          <a:ln>
-            <a:noFill/>
-          </a:ln>
-          <a:effectLst/>
-        </p:spPr>
-        <p:style>
-          <a:lnRef idx="1">
-            <a:schemeClr val="accent1"/>
-          </a:lnRef>
-          <a:fillRef idx="3">
-            <a:schemeClr val="accent1"/>
-          </a:fillRef>
-          <a:effectRef idx="2">
-            <a:schemeClr val="accent1"/>
-          </a:effectRef>
-          <a:fontRef idx="minor">
-            <a:schemeClr val="lt1"/>
-          </a:fontRef>
-        </p:style>
-        <p:txBody>
-          <a:bodyPr rtlCol="0" anchor="ctr" lIns="0" rIns="0" tIns="0" bIns="0"/>
-          <a:lstStyle/>
-          <a:p>
-            <a:pPr algn="ctr"/>
-            <a:r>
-              <a:rPr sz="750" b="1">
-                <a:solidFill>
-                  <a:srgbClr val="FFFFFF"/>
-                </a:solidFill>
-                <a:latin typeface="맑은 고딕"/>
-                <a:ea typeface="맑은 고딕"/>
-              </a:rPr>
-              <a:t>NEW</a:t>
-            </a:r>
-          </a:p>
-        </p:txBody>
-      </p:sp>
-      <p:sp>
-        <p:nvSpPr>
-          <p:cNvPr id="43" name="Rounded Rectangle 42"/>
-          <p:cNvSpPr/>
-          <p:nvPr/>
-        </p:nvSpPr>
-        <p:spPr>
-          <a:xfrm>
-            <a:off x="8610600" y="12179300"/>
-            <a:ext cx="342900" cy="177800"/>
-          </a:xfrm>
-          <a:prstGeom prst="roundRect">
-            <a:avLst/>
-          </a:prstGeom>
-          <a:solidFill>
-            <a:srgbClr val="B45309"/>
-          </a:solidFill>
-          <a:ln>
-            <a:noFill/>
-          </a:ln>
-          <a:effectLst/>
-        </p:spPr>
-        <p:style>
-          <a:lnRef idx="1">
-            <a:schemeClr val="accent1"/>
-          </a:lnRef>
-          <a:fillRef idx="3">
-            <a:schemeClr val="accent1"/>
-          </a:fillRef>
-          <a:effectRef idx="2">
-            <a:schemeClr val="accent1"/>
-          </a:effectRef>
-          <a:fontRef idx="minor">
-            <a:schemeClr val="lt1"/>
-          </a:fontRef>
-        </p:style>
-        <p:txBody>
-          <a:bodyPr rtlCol="0" anchor="ctr" lIns="0" rIns="0" tIns="0" bIns="0"/>
-          <a:lstStyle/>
-          <a:p>
-            <a:pPr algn="ctr"/>
-            <a:r>
-              <a:rPr sz="750" b="1">
-                <a:solidFill>
-                  <a:srgbClr val="FFFFFF"/>
-                </a:solidFill>
-                <a:latin typeface="맑은 고딕"/>
-                <a:ea typeface="맑은 고딕"/>
-              </a:rPr>
-              <a:t>변경</a:t>
-            </a:r>
-          </a:p>
-        </p:txBody>
-      </p:sp>
-      <p:sp>
-        <p:nvSpPr>
-          <p:cNvPr id="44" name="TextBox 43"/>
-          <p:cNvSpPr txBox="1"/>
-          <p:nvPr/>
-        </p:nvSpPr>
-        <p:spPr>
-          <a:xfrm>
-            <a:off x="7683500" y="12420600"/>
-            <a:ext cx="1422400" cy="152400"/>
-          </a:xfrm>
-          <a:prstGeom prst="rect">
-            <a:avLst/>
-          </a:prstGeom>
-          <a:noFill/>
-        </p:spPr>
-        <p:txBody>
-          <a:bodyPr wrap="square" anchor="t" lIns="0" rIns="0" tIns="0" bIns="0">
-            <a:spAutoFit/>
-          </a:bodyPr>
-          <a:lstStyle/>
-          <a:p>
-            <a:pPr algn="r"/>
-            <a:r>
-              <a:rPr sz="800" b="0">
-                <a:solidFill>
-                  <a:srgbClr val="94A3B8"/>
-                </a:solidFill>
-                <a:latin typeface="맑은 고딕"/>
-                <a:ea typeface="맑은 고딕"/>
-              </a:rPr>
-              <a:t>TO-BE 에서 바뀐 단계</a:t>
-            </a:r>
-          </a:p>
-        </p:txBody>
-      </p:sp>
-    </p:spTree>
-  </p:cSld>
-  <p:clrMapOvr>
-    <a:masterClrMapping/>
-  </p:clrMapOvr>
-</p:sld>
-</file>
-
-<file path=ppt/slides/slide5.xml><?xml version="1.0" encoding="utf-8"?>
-<p:sld xmlns:a="http://schemas.openxmlformats.org/drawingml/2006/main" xmlns:p="http://schemas.openxmlformats.org/presentationml/2006/main" xmlns:r="http://schemas.openxmlformats.org/officeDocument/2006/relationships">
-  <p:cSld>
-    <p:spTree>
-      <p:nvGrpSpPr>
-        <p:cNvPr id="1" name=""/>
-        <p:cNvGrpSpPr/>
-        <p:nvPr/>
-      </p:nvGrpSpPr>
-      <p:grpSpPr/>
-      <p:sp>
-        <p:nvSpPr>
-          <p:cNvPr id="2" name="Rounded Rectangle 1"/>
-          <p:cNvSpPr/>
-          <p:nvPr/>
-        </p:nvSpPr>
-        <p:spPr>
-          <a:xfrm>
-            <a:off x="825500" y="571500"/>
-            <a:ext cx="8280400" cy="508000"/>
-          </a:xfrm>
-          <a:prstGeom prst="roundRect">
-            <a:avLst>
-              <a:gd name="adj" fmla="val 18000"/>
-            </a:avLst>
-          </a:prstGeom>
-          <a:solidFill>
-            <a:srgbClr val="1E293B"/>
-          </a:solidFill>
-          <a:ln>
-            <a:noFill/>
-          </a:ln>
-          <a:effectLst/>
-        </p:spPr>
-        <p:style>
-          <a:lnRef idx="1">
-            <a:schemeClr val="accent1"/>
-          </a:lnRef>
-          <a:fillRef idx="3">
-            <a:schemeClr val="accent1"/>
-          </a:fillRef>
-          <a:effectRef idx="2">
-            <a:schemeClr val="accent1"/>
-          </a:effectRef>
-          <a:fontRef idx="minor">
-            <a:schemeClr val="lt1"/>
-          </a:fontRef>
-        </p:style>
-        <p:txBody>
-          <a:bodyPr rtlCol="0" anchor="ctr"/>
-          <a:lstStyle/>
-          <a:p>
-            <a:pPr algn="ctr"/>
-            <a:r>
-              <a:rPr sz="1650" b="1">
-                <a:solidFill>
-                  <a:srgbClr val="FFFFFF"/>
-                </a:solidFill>
-                <a:latin typeface="맑은 고딕"/>
-                <a:ea typeface="맑은 고딕"/>
-              </a:rPr>
-              <a:t>⑤ 질의 생성 (Query Generation)</a:t>
-            </a:r>
-          </a:p>
-        </p:txBody>
-      </p:sp>
-      <p:sp>
-        <p:nvSpPr>
-          <p:cNvPr id="3" name="TextBox 2"/>
-          <p:cNvSpPr txBox="1"/>
-          <p:nvPr/>
-        </p:nvSpPr>
-        <p:spPr>
-          <a:xfrm>
-            <a:off x="825500" y="1168400"/>
-            <a:ext cx="8280400" cy="304800"/>
-          </a:xfrm>
-          <a:prstGeom prst="rect">
-            <a:avLst/>
-          </a:prstGeom>
-          <a:noFill/>
-        </p:spPr>
-        <p:txBody>
-          <a:bodyPr wrap="square" anchor="t" lIns="0" rIns="0" tIns="0" bIns="0">
-            <a:spAutoFit/>
-          </a:bodyPr>
-          <a:lstStyle/>
-          <a:p>
-            <a:pPr algn="ctr"/>
-            <a:r>
-              <a:rPr sz="1100" b="0">
-                <a:solidFill>
-                  <a:srgbClr val="64748B"/>
-                </a:solidFill>
-                <a:latin typeface="맑은 고딕"/>
-                <a:ea typeface="맑은 고딕"/>
-              </a:rPr>
-              <a:t>넓게 고르고 점점 좁힌다 — 단계마다 LLM 에는 그 판단에 필요한 정보만 (컨텍스트 16K)</a:t>
-            </a:r>
-          </a:p>
-        </p:txBody>
-      </p:sp>
-      <p:sp>
-        <p:nvSpPr>
-          <p:cNvPr id="4" name="Rounded Rectangle 3"/>
-          <p:cNvSpPr/>
-          <p:nvPr/>
-        </p:nvSpPr>
-        <p:spPr>
-          <a:xfrm>
-            <a:off x="8483600" y="660400"/>
-            <a:ext cx="533400" cy="203200"/>
-          </a:xfrm>
-          <a:prstGeom prst="roundRect">
-            <a:avLst/>
-          </a:prstGeom>
-          <a:solidFill>
-            <a:srgbClr val="D96C06"/>
-          </a:solidFill>
-          <a:ln>
-            <a:noFill/>
-          </a:ln>
-          <a:effectLst/>
-        </p:spPr>
-        <p:style>
-          <a:lnRef idx="1">
-            <a:schemeClr val="accent1"/>
-          </a:lnRef>
-          <a:fillRef idx="3">
-            <a:schemeClr val="accent1"/>
-          </a:fillRef>
-          <a:effectRef idx="2">
-            <a:schemeClr val="accent1"/>
-          </a:effectRef>
-          <a:fontRef idx="minor">
-            <a:schemeClr val="lt1"/>
-          </a:fontRef>
-        </p:style>
-        <p:txBody>
-          <a:bodyPr rtlCol="0" anchor="ctr" lIns="0" rIns="0" tIns="0" bIns="0"/>
-          <a:lstStyle/>
-          <a:p>
-            <a:pPr algn="ctr"/>
-            <a:r>
-              <a:rPr sz="800" b="1">
-                <a:solidFill>
-                  <a:srgbClr val="FFFFFF"/>
-                </a:solidFill>
-                <a:latin typeface="맑은 고딕"/>
-                <a:ea typeface="맑은 고딕"/>
-              </a:rPr>
-              <a:t>TO-BE</a:t>
-            </a:r>
-          </a:p>
-        </p:txBody>
-      </p:sp>
-      <p:sp>
-        <p:nvSpPr>
-          <p:cNvPr id="5" name="Oval 4"/>
-          <p:cNvSpPr/>
-          <p:nvPr/>
-        </p:nvSpPr>
-        <p:spPr>
-          <a:xfrm>
-            <a:off x="825500" y="1676400"/>
-            <a:ext cx="4572000" cy="355600"/>
-          </a:xfrm>
-          <a:prstGeom prst="ellipse">
-            <a:avLst/>
-          </a:prstGeom>
-          <a:solidFill>
-            <a:srgbClr val="E0E7FF"/>
-          </a:solidFill>
-          <a:ln w="12700">
-            <a:solidFill>
-              <a:srgbClr val="818CF8"/>
-            </a:solidFill>
-          </a:ln>
-          <a:effectLst/>
-        </p:spPr>
-        <p:style>
-          <a:lnRef idx="1">
-            <a:schemeClr val="accent1"/>
-          </a:lnRef>
-          <a:fillRef idx="3">
-            <a:schemeClr val="accent1"/>
-          </a:fillRef>
-          <a:effectRef idx="2">
-            <a:schemeClr val="accent1"/>
-          </a:effectRef>
-          <a:fontRef idx="minor">
-            <a:schemeClr val="lt1"/>
-          </a:fontRef>
-        </p:style>
-        <p:txBody>
-          <a:bodyPr rtlCol="0" anchor="ctr" wrap="square" lIns="127000" rIns="127000" tIns="25400" bIns="25400"/>
-          <a:lstStyle/>
-          <a:p>
-            <a:pPr algn="ctr"/>
-            <a:r>
-              <a:rPr sz="1250" b="1">
-                <a:solidFill>
-                  <a:srgbClr val="1E293B"/>
-                </a:solidFill>
-                <a:latin typeface="맑은 고딕"/>
-                <a:ea typeface="맑은 고딕"/>
-              </a:rPr>
-              <a:t>시작</a:t>
-            </a:r>
-          </a:p>
-        </p:txBody>
-      </p:sp>
-      <p:cxnSp>
-        <p:nvCxnSpPr>
-          <p:cNvPr id="6" name="Connector 5"/>
-          <p:cNvCxnSpPr/>
-          <p:nvPr/>
-        </p:nvCxnSpPr>
-        <p:spPr>
-          <a:xfrm>
-            <a:off x="3111500" y="2032000"/>
-            <a:ext cx="0" cy="228600"/>
-          </a:xfrm>
-          <a:prstGeom prst="line">
-            <a:avLst/>
-          </a:prstGeom>
-          <a:ln w="13970">
-            <a:solidFill>
-              <a:srgbClr val="94A3B8"/>
-            </a:solidFill>
-            <a:tailEnd type="triangle" w="med" len="med"/>
-          </a:ln>
-        </p:spPr>
-        <p:style>
-          <a:lnRef idx="2">
-            <a:schemeClr val="accent1"/>
-          </a:lnRef>
-          <a:fillRef idx="0">
-            <a:schemeClr val="accent1"/>
-          </a:fillRef>
-          <a:effectRef idx="1">
-            <a:schemeClr val="accent1"/>
-          </a:effectRef>
-          <a:fontRef idx="minor">
-            <a:schemeClr val="tx1"/>
-          </a:fontRef>
-        </p:style>
-      </p:cxnSp>
-      <p:sp>
-        <p:nvSpPr>
-          <p:cNvPr id="7" name="Parallelogram 6"/>
-          <p:cNvSpPr/>
-          <p:nvPr/>
-        </p:nvSpPr>
-        <p:spPr>
-          <a:xfrm>
-            <a:off x="825500" y="2260600"/>
-            <a:ext cx="4572000" cy="584200"/>
-          </a:xfrm>
-          <a:prstGeom prst="parallelogram">
-            <a:avLst/>
-          </a:prstGeom>
-          <a:solidFill>
-            <a:srgbClr val="ECFDF5"/>
-          </a:solidFill>
-          <a:ln w="12700">
-            <a:solidFill>
-              <a:srgbClr val="34D399"/>
-            </a:solidFill>
-          </a:ln>
-          <a:effectLst/>
-        </p:spPr>
-        <p:style>
-          <a:lnRef idx="1">
-            <a:schemeClr val="accent1"/>
-          </a:lnRef>
-          <a:fillRef idx="3">
-            <a:schemeClr val="accent1"/>
-          </a:fillRef>
-          <a:effectRef idx="2">
-            <a:schemeClr val="accent1"/>
-          </a:effectRef>
-          <a:fontRef idx="minor">
-            <a:schemeClr val="lt1"/>
-          </a:fontRef>
-        </p:style>
-        <p:txBody>
-          <a:bodyPr rtlCol="0" anchor="ctr" wrap="square" lIns="279400" rIns="279400" tIns="25400" bIns="25400"/>
-          <a:lstStyle/>
-          <a:p>
-            <a:pPr algn="ctr"/>
-            <a:r>
-              <a:rPr sz="1250" b="1">
-                <a:solidFill>
-                  <a:srgbClr val="1E293B"/>
-                </a:solidFill>
-                <a:latin typeface="맑은 고딕"/>
-                <a:ea typeface="맑은 고딕"/>
-              </a:rPr>
-              <a:t>시스템 선택 + 자연어 질문</a:t>
-            </a:r>
-          </a:p>
-          <a:p>
-            <a:pPr algn="ctr"/>
-            <a:r>
-              <a:rPr sz="950" b="0">
-                <a:solidFill>
-                  <a:srgbClr val="64748B"/>
-                </a:solidFill>
-                <a:latin typeface="맑은 고딕"/>
-                <a:ea typeface="맑은 고딕"/>
-              </a:rPr>
-              <a:t>이전 질문은 전달되지 않음 — 매 요청 독립</a:t>
-            </a:r>
-          </a:p>
-        </p:txBody>
-      </p:sp>
-      <p:cxnSp>
-        <p:nvCxnSpPr>
-          <p:cNvPr id="8" name="Connector 7"/>
-          <p:cNvCxnSpPr/>
-          <p:nvPr/>
-        </p:nvCxnSpPr>
-        <p:spPr>
-          <a:xfrm>
-            <a:off x="3111500" y="2844800"/>
-            <a:ext cx="0" cy="228600"/>
-          </a:xfrm>
-          <a:prstGeom prst="line">
-            <a:avLst/>
-          </a:prstGeom>
-          <a:ln w="13970">
-            <a:solidFill>
-              <a:srgbClr val="94A3B8"/>
-            </a:solidFill>
-            <a:tailEnd type="triangle" w="med" len="med"/>
-          </a:ln>
-        </p:spPr>
-        <p:style>
-          <a:lnRef idx="2">
-            <a:schemeClr val="accent1"/>
-          </a:lnRef>
-          <a:fillRef idx="0">
-            <a:schemeClr val="accent1"/>
-          </a:fillRef>
-          <a:effectRef idx="1">
-            <a:schemeClr val="accent1"/>
-          </a:effectRef>
-          <a:fontRef idx="minor">
-            <a:schemeClr val="tx1"/>
-          </a:fontRef>
-        </p:style>
-      </p:cxnSp>
-      <p:sp>
-        <p:nvSpPr>
-          <p:cNvPr id="9" name="Rectangle 8"/>
-          <p:cNvSpPr/>
-          <p:nvPr/>
-        </p:nvSpPr>
-        <p:spPr>
-          <a:xfrm>
-            <a:off x="825500" y="3073400"/>
-            <a:ext cx="4572000" cy="736600"/>
+            <a:off x="825500" y="5943600"/>
+            <a:ext cx="4572000" cy="711200"/>
           </a:xfrm>
           <a:prstGeom prst="rect">
             <a:avLst/>
@@ -12360,7 +10387,7 @@
                 <a:latin typeface="맑은 고딕"/>
                 <a:ea typeface="맑은 고딕"/>
               </a:rPr>
-              <a:t>테이블 추론 (LLM)</a:t>
+              <a:t>지표 선택 (LLM)</a:t>
             </a:r>
           </a:p>
           <a:p>
@@ -12373,674 +10400,7 @@
                 <a:latin typeface="맑은 고딕"/>
                 <a:ea typeface="맑은 고딕"/>
               </a:rPr>
-              <a:t>업무 영역 설명 + 시스템 테이블의 한 줄 요약 목록을 보고</a:t>
-            </a:r>
-          </a:p>
-          <a:p>
-            <a:pPr algn="ctr"/>
-            <a:r>
-              <a:rPr sz="950" b="0">
-                <a:solidFill>
-                  <a:srgbClr val="64748B"/>
-                </a:solidFill>
-                <a:latin typeface="맑은 고딕"/>
-                <a:ea typeface="맑은 고딕"/>
-              </a:rPr>
-              <a:t>3~5개와 이유 — 놓치지 않기 우선</a:t>
-            </a:r>
-          </a:p>
-        </p:txBody>
-      </p:sp>
-      <p:sp>
-        <p:nvSpPr>
-          <p:cNvPr id="10" name="Rounded Rectangle 9"/>
-          <p:cNvSpPr/>
-          <p:nvPr/>
-        </p:nvSpPr>
-        <p:spPr>
-          <a:xfrm>
-            <a:off x="4965700" y="3060700"/>
-            <a:ext cx="355600" cy="177800"/>
-          </a:xfrm>
-          <a:prstGeom prst="roundRect">
-            <a:avLst/>
-          </a:prstGeom>
-          <a:solidFill>
-            <a:srgbClr val="D96C06"/>
-          </a:solidFill>
-          <a:ln>
-            <a:noFill/>
-          </a:ln>
-          <a:effectLst/>
-        </p:spPr>
-        <p:style>
-          <a:lnRef idx="1">
-            <a:schemeClr val="accent1"/>
-          </a:lnRef>
-          <a:fillRef idx="3">
-            <a:schemeClr val="accent1"/>
-          </a:fillRef>
-          <a:effectRef idx="2">
-            <a:schemeClr val="accent1"/>
-          </a:effectRef>
-          <a:fontRef idx="minor">
-            <a:schemeClr val="lt1"/>
-          </a:fontRef>
-        </p:style>
-        <p:txBody>
-          <a:bodyPr rtlCol="0" anchor="ctr" lIns="0" rIns="0" tIns="0" bIns="0"/>
-          <a:lstStyle/>
-          <a:p>
-            <a:pPr algn="ctr"/>
-            <a:r>
-              <a:rPr sz="750" b="1">
-                <a:solidFill>
-                  <a:srgbClr val="FFFFFF"/>
-                </a:solidFill>
-                <a:latin typeface="맑은 고딕"/>
-                <a:ea typeface="맑은 고딕"/>
-              </a:rPr>
-              <a:t>NEW</a:t>
-            </a:r>
-          </a:p>
-        </p:txBody>
-      </p:sp>
-      <p:sp>
-        <p:nvSpPr>
-          <p:cNvPr id="11" name="Rounded Rectangle 10"/>
-          <p:cNvSpPr/>
-          <p:nvPr/>
-        </p:nvSpPr>
-        <p:spPr>
-          <a:xfrm>
-            <a:off x="4229100" y="3060700"/>
-            <a:ext cx="355600" cy="177800"/>
-          </a:xfrm>
-          <a:prstGeom prst="roundRect">
-            <a:avLst/>
-          </a:prstGeom>
-          <a:solidFill>
-            <a:srgbClr val="0F766E"/>
-          </a:solidFill>
-          <a:ln>
-            <a:noFill/>
-          </a:ln>
-          <a:effectLst/>
-        </p:spPr>
-        <p:style>
-          <a:lnRef idx="1">
-            <a:schemeClr val="accent1"/>
-          </a:lnRef>
-          <a:fillRef idx="3">
-            <a:schemeClr val="accent1"/>
-          </a:fillRef>
-          <a:effectRef idx="2">
-            <a:schemeClr val="accent1"/>
-          </a:effectRef>
-          <a:fontRef idx="minor">
-            <a:schemeClr val="lt1"/>
-          </a:fontRef>
-        </p:style>
-        <p:txBody>
-          <a:bodyPr rtlCol="0" anchor="ctr" lIns="0" rIns="0" tIns="0" bIns="0"/>
-          <a:lstStyle/>
-          <a:p>
-            <a:pPr algn="ctr"/>
-            <a:r>
-              <a:rPr sz="750" b="1">
-                <a:solidFill>
-                  <a:srgbClr val="FFFFFF"/>
-                </a:solidFill>
-                <a:latin typeface="맑은 고딕"/>
-                <a:ea typeface="맑은 고딕"/>
-              </a:rPr>
-              <a:t>LLM</a:t>
-            </a:r>
-          </a:p>
-        </p:txBody>
-      </p:sp>
-      <p:cxnSp>
-        <p:nvCxnSpPr>
-          <p:cNvPr id="12" name="Connector 11"/>
-          <p:cNvCxnSpPr/>
-          <p:nvPr/>
-        </p:nvCxnSpPr>
-        <p:spPr>
-          <a:xfrm>
-            <a:off x="3111500" y="3810000"/>
-            <a:ext cx="0" cy="228600"/>
-          </a:xfrm>
-          <a:prstGeom prst="line">
-            <a:avLst/>
-          </a:prstGeom>
-          <a:ln w="13970">
-            <a:solidFill>
-              <a:srgbClr val="94A3B8"/>
-            </a:solidFill>
-            <a:tailEnd type="triangle" w="med" len="med"/>
-          </a:ln>
-        </p:spPr>
-        <p:style>
-          <a:lnRef idx="2">
-            <a:schemeClr val="accent1"/>
-          </a:lnRef>
-          <a:fillRef idx="0">
-            <a:schemeClr val="accent1"/>
-          </a:fillRef>
-          <a:effectRef idx="1">
-            <a:schemeClr val="accent1"/>
-          </a:effectRef>
-          <a:fontRef idx="minor">
-            <a:schemeClr val="tx1"/>
-          </a:fontRef>
-        </p:style>
-      </p:cxnSp>
-      <p:sp>
-        <p:nvSpPr>
-          <p:cNvPr id="13" name="Diamond 12"/>
-          <p:cNvSpPr/>
-          <p:nvPr/>
-        </p:nvSpPr>
-        <p:spPr>
-          <a:xfrm>
-            <a:off x="825500" y="4038600"/>
-            <a:ext cx="4572000" cy="787400"/>
-          </a:xfrm>
-          <a:prstGeom prst="diamond">
-            <a:avLst/>
-          </a:prstGeom>
-          <a:solidFill>
-            <a:srgbClr val="FFFBEB"/>
-          </a:solidFill>
-          <a:ln w="12700">
-            <a:solidFill>
-              <a:srgbClr val="FBBF24"/>
-            </a:solidFill>
-          </a:ln>
-          <a:effectLst/>
-        </p:spPr>
-        <p:style>
-          <a:lnRef idx="1">
-            <a:schemeClr val="accent1"/>
-          </a:lnRef>
-          <a:fillRef idx="3">
-            <a:schemeClr val="accent1"/>
-          </a:fillRef>
-          <a:effectRef idx="2">
-            <a:schemeClr val="accent1"/>
-          </a:effectRef>
-          <a:fontRef idx="minor">
-            <a:schemeClr val="lt1"/>
-          </a:fontRef>
-        </p:style>
-        <p:txBody>
-          <a:bodyPr rtlCol="0" anchor="ctr" wrap="square" lIns="0" rIns="0" tIns="25400" bIns="25400"/>
-          <a:lstStyle/>
-          <a:p>
-            <a:pPr algn="ctr"/>
-            <a:r>
-              <a:rPr sz="1250" b="1">
-                <a:solidFill>
-                  <a:srgbClr val="1E293B"/>
-                </a:solidFill>
-                <a:latin typeface="맑은 고딕"/>
-                <a:ea typeface="맑은 고딕"/>
-              </a:rPr>
-              <a:t>후보 테이블이 있나</a:t>
-            </a:r>
-          </a:p>
-        </p:txBody>
-      </p:sp>
-      <p:sp>
-        <p:nvSpPr>
-          <p:cNvPr id="14" name="Parallelogram 13"/>
-          <p:cNvSpPr/>
-          <p:nvPr/>
-        </p:nvSpPr>
-        <p:spPr>
-          <a:xfrm>
-            <a:off x="5994400" y="4140200"/>
-            <a:ext cx="3111500" cy="584200"/>
-          </a:xfrm>
-          <a:prstGeom prst="parallelogram">
-            <a:avLst/>
-          </a:prstGeom>
-          <a:solidFill>
-            <a:srgbClr val="FEF2F2"/>
-          </a:solidFill>
-          <a:ln w="12700">
-            <a:solidFill>
-              <a:srgbClr val="F87171"/>
-            </a:solidFill>
-          </a:ln>
-          <a:effectLst/>
-        </p:spPr>
-        <p:style>
-          <a:lnRef idx="1">
-            <a:schemeClr val="accent1"/>
-          </a:lnRef>
-          <a:fillRef idx="3">
-            <a:schemeClr val="accent1"/>
-          </a:fillRef>
-          <a:effectRef idx="2">
-            <a:schemeClr val="accent1"/>
-          </a:effectRef>
-          <a:fontRef idx="minor">
-            <a:schemeClr val="lt1"/>
-          </a:fontRef>
-        </p:style>
-        <p:txBody>
-          <a:bodyPr rtlCol="0" anchor="ctr" wrap="square" lIns="279400" rIns="279400" tIns="25400" bIns="25400"/>
-          <a:lstStyle/>
-          <a:p>
-            <a:pPr algn="ctr"/>
-            <a:r>
-              <a:rPr sz="1250" b="1">
-                <a:solidFill>
-                  <a:srgbClr val="1E293B"/>
-                </a:solidFill>
-                <a:latin typeface="맑은 고딕"/>
-                <a:ea typeface="맑은 고딕"/>
-              </a:rPr>
-              <a:t>되묻기</a:t>
-            </a:r>
-          </a:p>
-          <a:p>
-            <a:pPr algn="ctr"/>
-            <a:r>
-              <a:rPr sz="950" b="0">
-                <a:solidFill>
-                  <a:srgbClr val="7F1D1D"/>
-                </a:solidFill>
-                <a:latin typeface="맑은 고딕"/>
-                <a:ea typeface="맑은 고딕"/>
-              </a:rPr>
-              <a:t>업무 영역 안내 + 질문 다시</a:t>
-            </a:r>
-          </a:p>
-        </p:txBody>
-      </p:sp>
-      <p:cxnSp>
-        <p:nvCxnSpPr>
-          <p:cNvPr id="15" name="Connector 14"/>
-          <p:cNvCxnSpPr/>
-          <p:nvPr/>
-        </p:nvCxnSpPr>
-        <p:spPr>
-          <a:xfrm>
-            <a:off x="5397500" y="4432300"/>
-            <a:ext cx="774700" cy="0"/>
-          </a:xfrm>
-          <a:prstGeom prst="line">
-            <a:avLst/>
-          </a:prstGeom>
-          <a:ln w="13970">
-            <a:solidFill>
-              <a:srgbClr val="94A3B8"/>
-            </a:solidFill>
-            <a:tailEnd type="triangle" w="med" len="med"/>
-          </a:ln>
-        </p:spPr>
-        <p:style>
-          <a:lnRef idx="2">
-            <a:schemeClr val="accent1"/>
-          </a:lnRef>
-          <a:fillRef idx="0">
-            <a:schemeClr val="accent1"/>
-          </a:fillRef>
-          <a:effectRef idx="1">
-            <a:schemeClr val="accent1"/>
-          </a:effectRef>
-          <a:fontRef idx="minor">
-            <a:schemeClr val="tx1"/>
-          </a:fontRef>
-        </p:style>
-      </p:cxnSp>
-      <p:sp>
-        <p:nvSpPr>
-          <p:cNvPr id="16" name="TextBox 15"/>
-          <p:cNvSpPr txBox="1"/>
-          <p:nvPr/>
-        </p:nvSpPr>
-        <p:spPr>
-          <a:xfrm>
-            <a:off x="5422900" y="4241800"/>
-            <a:ext cx="546100" cy="152400"/>
-          </a:xfrm>
-          <a:prstGeom prst="rect">
-            <a:avLst/>
-          </a:prstGeom>
-          <a:noFill/>
-        </p:spPr>
-        <p:txBody>
-          <a:bodyPr wrap="square" anchor="t" lIns="0" rIns="0" tIns="0" bIns="0">
-            <a:spAutoFit/>
-          </a:bodyPr>
-          <a:lstStyle/>
-          <a:p>
-            <a:pPr algn="ctr"/>
-            <a:r>
-              <a:rPr sz="850" b="0">
-                <a:solidFill>
-                  <a:srgbClr val="94A3B8"/>
-                </a:solidFill>
-                <a:latin typeface="맑은 고딕"/>
-                <a:ea typeface="맑은 고딕"/>
-              </a:rPr>
-              <a:t>없음</a:t>
-            </a:r>
-          </a:p>
-        </p:txBody>
-      </p:sp>
-      <p:cxnSp>
-        <p:nvCxnSpPr>
-          <p:cNvPr id="17" name="Connector 16"/>
-          <p:cNvCxnSpPr/>
-          <p:nvPr/>
-        </p:nvCxnSpPr>
-        <p:spPr>
-          <a:xfrm>
-            <a:off x="3111500" y="4826000"/>
-            <a:ext cx="0" cy="228600"/>
-          </a:xfrm>
-          <a:prstGeom prst="line">
-            <a:avLst/>
-          </a:prstGeom>
-          <a:ln w="13970">
-            <a:solidFill>
-              <a:srgbClr val="94A3B8"/>
-            </a:solidFill>
-            <a:tailEnd type="triangle" w="med" len="med"/>
-          </a:ln>
-        </p:spPr>
-        <p:style>
-          <a:lnRef idx="2">
-            <a:schemeClr val="accent1"/>
-          </a:lnRef>
-          <a:fillRef idx="0">
-            <a:schemeClr val="accent1"/>
-          </a:fillRef>
-          <a:effectRef idx="1">
-            <a:schemeClr val="accent1"/>
-          </a:effectRef>
-          <a:fontRef idx="minor">
-            <a:schemeClr val="tx1"/>
-          </a:fontRef>
-        </p:style>
-      </p:cxnSp>
-      <p:sp>
-        <p:nvSpPr>
-          <p:cNvPr id="18" name="TextBox 17"/>
-          <p:cNvSpPr txBox="1"/>
-          <p:nvPr/>
-        </p:nvSpPr>
-        <p:spPr>
-          <a:xfrm>
-            <a:off x="1892300" y="4870450"/>
-            <a:ext cx="1143000" cy="139700"/>
-          </a:xfrm>
-          <a:prstGeom prst="rect">
-            <a:avLst/>
-          </a:prstGeom>
-          <a:noFill/>
-        </p:spPr>
-        <p:txBody>
-          <a:bodyPr wrap="square" anchor="t" lIns="0" rIns="0" tIns="0" bIns="0">
-            <a:spAutoFit/>
-          </a:bodyPr>
-          <a:lstStyle/>
-          <a:p>
-            <a:pPr algn="r"/>
-            <a:r>
-              <a:rPr sz="800" b="0">
-                <a:solidFill>
-                  <a:srgbClr val="94A3B8"/>
-                </a:solidFill>
-                <a:latin typeface="맑은 고딕"/>
-                <a:ea typeface="맑은 고딕"/>
-              </a:rPr>
-              <a:t>있음</a:t>
-            </a:r>
-          </a:p>
-        </p:txBody>
-      </p:sp>
-      <p:sp>
-        <p:nvSpPr>
-          <p:cNvPr id="19" name="Parallelogram 18"/>
-          <p:cNvSpPr/>
-          <p:nvPr/>
-        </p:nvSpPr>
-        <p:spPr>
-          <a:xfrm>
-            <a:off x="825500" y="5054600"/>
-            <a:ext cx="4572000" cy="660400"/>
-          </a:xfrm>
-          <a:prstGeom prst="parallelogram">
-            <a:avLst/>
-          </a:prstGeom>
-          <a:solidFill>
-            <a:srgbClr val="ECFDF5"/>
-          </a:solidFill>
-          <a:ln w="12700">
-            <a:solidFill>
-              <a:srgbClr val="34D399"/>
-            </a:solidFill>
-          </a:ln>
-          <a:effectLst/>
-        </p:spPr>
-        <p:style>
-          <a:lnRef idx="1">
-            <a:schemeClr val="accent1"/>
-          </a:lnRef>
-          <a:fillRef idx="3">
-            <a:schemeClr val="accent1"/>
-          </a:fillRef>
-          <a:effectRef idx="2">
-            <a:schemeClr val="accent1"/>
-          </a:effectRef>
-          <a:fontRef idx="minor">
-            <a:schemeClr val="lt1"/>
-          </a:fontRef>
-        </p:style>
-        <p:txBody>
-          <a:bodyPr rtlCol="0" anchor="ctr" wrap="square" lIns="279400" rIns="279400" tIns="25400" bIns="25400"/>
-          <a:lstStyle/>
-          <a:p>
-            <a:pPr algn="ctr"/>
-            <a:r>
-              <a:rPr sz="1250" b="1">
-                <a:solidFill>
-                  <a:srgbClr val="1E293B"/>
-                </a:solidFill>
-                <a:latin typeface="맑은 고딕"/>
-                <a:ea typeface="맑은 고딕"/>
-              </a:rPr>
-              <a:t>지표 후보 조회</a:t>
-            </a:r>
-          </a:p>
-          <a:p>
-            <a:pPr algn="ctr"/>
-            <a:r>
-              <a:rPr sz="950" b="0">
-                <a:solidFill>
-                  <a:srgbClr val="64748B"/>
-                </a:solidFill>
-                <a:latin typeface="맑은 고딕"/>
-                <a:ea typeface="맑은 고딕"/>
-              </a:rPr>
-              <a:t>metric_table 로 조회 (검색 아님)</a:t>
-            </a:r>
-          </a:p>
-          <a:p>
-            <a:pPr algn="ctr"/>
-            <a:r>
-              <a:rPr sz="950" b="0">
-                <a:solidFill>
-                  <a:srgbClr val="64748B"/>
-                </a:solidFill>
-                <a:latin typeface="맑은 고딕"/>
-                <a:ea typeface="맑은 고딕"/>
-              </a:rPr>
-              <a:t>조인 지표 포함 · active 만</a:t>
-            </a:r>
-          </a:p>
-        </p:txBody>
-      </p:sp>
-      <p:sp>
-        <p:nvSpPr>
-          <p:cNvPr id="20" name="Rounded Rectangle 19"/>
-          <p:cNvSpPr/>
-          <p:nvPr/>
-        </p:nvSpPr>
-        <p:spPr>
-          <a:xfrm>
-            <a:off x="4965700" y="5041900"/>
-            <a:ext cx="355600" cy="177800"/>
-          </a:xfrm>
-          <a:prstGeom prst="roundRect">
-            <a:avLst/>
-          </a:prstGeom>
-          <a:solidFill>
-            <a:srgbClr val="D96C06"/>
-          </a:solidFill>
-          <a:ln>
-            <a:noFill/>
-          </a:ln>
-          <a:effectLst/>
-        </p:spPr>
-        <p:style>
-          <a:lnRef idx="1">
-            <a:schemeClr val="accent1"/>
-          </a:lnRef>
-          <a:fillRef idx="3">
-            <a:schemeClr val="accent1"/>
-          </a:fillRef>
-          <a:effectRef idx="2">
-            <a:schemeClr val="accent1"/>
-          </a:effectRef>
-          <a:fontRef idx="minor">
-            <a:schemeClr val="lt1"/>
-          </a:fontRef>
-        </p:style>
-        <p:txBody>
-          <a:bodyPr rtlCol="0" anchor="ctr" lIns="0" rIns="0" tIns="0" bIns="0"/>
-          <a:lstStyle/>
-          <a:p>
-            <a:pPr algn="ctr"/>
-            <a:r>
-              <a:rPr sz="750" b="1">
-                <a:solidFill>
-                  <a:srgbClr val="FFFFFF"/>
-                </a:solidFill>
-                <a:latin typeface="맑은 고딕"/>
-                <a:ea typeface="맑은 고딕"/>
-              </a:rPr>
-              <a:t>NEW</a:t>
-            </a:r>
-          </a:p>
-        </p:txBody>
-      </p:sp>
-      <p:cxnSp>
-        <p:nvCxnSpPr>
-          <p:cNvPr id="21" name="Connector 20"/>
-          <p:cNvCxnSpPr/>
-          <p:nvPr/>
-        </p:nvCxnSpPr>
-        <p:spPr>
-          <a:xfrm>
-            <a:off x="3111500" y="5715000"/>
-            <a:ext cx="0" cy="228600"/>
-          </a:xfrm>
-          <a:prstGeom prst="line">
-            <a:avLst/>
-          </a:prstGeom>
-          <a:ln w="13970">
-            <a:solidFill>
-              <a:srgbClr val="94A3B8"/>
-            </a:solidFill>
-            <a:tailEnd type="triangle" w="med" len="med"/>
-          </a:ln>
-        </p:spPr>
-        <p:style>
-          <a:lnRef idx="2">
-            <a:schemeClr val="accent1"/>
-          </a:lnRef>
-          <a:fillRef idx="0">
-            <a:schemeClr val="accent1"/>
-          </a:fillRef>
-          <a:effectRef idx="1">
-            <a:schemeClr val="accent1"/>
-          </a:effectRef>
-          <a:fontRef idx="minor">
-            <a:schemeClr val="tx1"/>
-          </a:fontRef>
-        </p:style>
-      </p:cxnSp>
-      <p:sp>
-        <p:nvSpPr>
-          <p:cNvPr id="22" name="Rectangle 21"/>
-          <p:cNvSpPr/>
-          <p:nvPr/>
-        </p:nvSpPr>
-        <p:spPr>
-          <a:xfrm>
-            <a:off x="825500" y="5943600"/>
-            <a:ext cx="4572000" cy="711200"/>
-          </a:xfrm>
-          <a:prstGeom prst="rect">
-            <a:avLst/>
-          </a:prstGeom>
-          <a:solidFill>
-            <a:srgbClr val="EFF6FF"/>
-          </a:solidFill>
-          <a:ln w="12700">
-            <a:solidFill>
-              <a:srgbClr val="60A5FA"/>
-            </a:solidFill>
-          </a:ln>
-          <a:effectLst/>
-        </p:spPr>
-        <p:style>
-          <a:lnRef idx="1">
-            <a:schemeClr val="accent1"/>
-          </a:lnRef>
-          <a:fillRef idx="3">
-            <a:schemeClr val="accent1"/>
-          </a:fillRef>
-          <a:effectRef idx="2">
-            <a:schemeClr val="accent1"/>
-          </a:effectRef>
-          <a:fontRef idx="minor">
-            <a:schemeClr val="lt1"/>
-          </a:fontRef>
-        </p:style>
-        <p:txBody>
-          <a:bodyPr rtlCol="0" anchor="ctr" wrap="square" lIns="127000" rIns="127000" tIns="25400" bIns="25400"/>
-          <a:lstStyle/>
-          <a:p>
-            <a:pPr algn="ctr"/>
-            <a:r>
-              <a:rPr sz="1250" b="1">
-                <a:solidFill>
-                  <a:srgbClr val="1E293B"/>
-                </a:solidFill>
-                <a:latin typeface="맑은 고딕"/>
-                <a:ea typeface="맑은 고딕"/>
-              </a:rPr>
-              <a:t>지표 선택 (LLM)</a:t>
-            </a:r>
-          </a:p>
-          <a:p>
-            <a:pPr algn="ctr"/>
-            <a:r>
-              <a:rPr sz="950" b="0">
-                <a:solidFill>
-                  <a:srgbClr val="64748B"/>
-                </a:solidFill>
-                <a:latin typeface="맑은 고딕"/>
-                <a:ea typeface="맑은 고딕"/>
-              </a:rPr>
-              <a:t>후보 지표의 이름 · 설명 · 예시 질문만 보고</a:t>
+              <a:t>후보 지표의 이름 · 설명 · 같은 말만 보고</a:t>
             </a:r>
           </a:p>
           <a:p>
